--- a/public/fun/pack/pptx/wedding/결혼식_09_오시는길중심_모내기날.pptx
+++ b/public/fun/pack/pptx/wedding/결혼식_09_오시는길중심_모내기날.pptx
@@ -3347,7 +3347,7 @@
             <a:r>
               <a:rPr sz="3600" b="1" i="0">
                 <a:solidFill>
-                  <a:srgbClr val="1C401C"/>
+                  <a:srgbClr val="216E21"/>
                 </a:solidFill>
               </a:rPr>
               <a:t>저희 결혼합니다</a:t>
@@ -3385,7 +3385,7 @@
             <a:r>
               <a:rPr sz="1700" b="0" i="1">
                 <a:solidFill>
-                  <a:srgbClr val="1C401C"/>
+                  <a:srgbClr val="216E21"/>
                 </a:solidFill>
               </a:rPr>
               <a:t>주차는 건물 지하를 이용해 주세요</a:t>
@@ -3460,7 +3460,7 @@
     <p:bg>
       <p:bgPr>
         <a:solidFill>
-          <a:srgbClr val="F1F9F1"/>
+          <a:srgbClr val="F3FCF3"/>
         </a:solidFill>
         <a:effectLst/>
       </p:bgPr>
@@ -3487,7 +3487,7 @@
             <a:avLst/>
           </a:prstGeom>
           <a:solidFill>
-            <a:srgbClr val="3A883A"/>
+            <a:srgbClr val="4ECA4E"/>
           </a:solidFill>
           <a:ln>
             <a:noFill/>
@@ -3516,7 +3516,7 @@
             <a:avLst/>
           </a:prstGeom>
           <a:solidFill>
-            <a:srgbClr val="663D8F"/>
+            <a:srgbClr val="339941"/>
           </a:solidFill>
           <a:ln>
             <a:noFill/>
@@ -3560,7 +3560,7 @@
             <a:r>
               <a:rPr sz="3000" b="1" i="0">
                 <a:solidFill>
-                  <a:srgbClr val="1C401C"/>
+                  <a:srgbClr val="216E21"/>
                 </a:solidFill>
               </a:rPr>
               <a:t>신랑 · 신부 소개</a:t>
@@ -3583,11 +3583,11 @@
             <a:avLst/>
           </a:prstGeom>
           <a:solidFill>
-            <a:srgbClr val="D3EED3"/>
+            <a:srgbClr val="D4F7D4"/>
           </a:solidFill>
           <a:ln w="19050">
             <a:solidFill>
-              <a:srgbClr val="3A883A"/>
+              <a:srgbClr val="4ECA4E"/>
             </a:solidFill>
             <a:prstDash val="dash"/>
           </a:ln>
@@ -3606,7 +3606,7 @@
             <a:r>
               <a:rPr sz="1200" b="0" i="0">
                 <a:solidFill>
-                  <a:srgbClr val="1C401C"/>
+                  <a:srgbClr val="216E21"/>
                 </a:solidFill>
               </a:rPr>
               <a:t>사진</a:t>
@@ -3644,7 +3644,7 @@
             <a:r>
               <a:rPr sz="1600" b="1" i="0">
                 <a:solidFill>
-                  <a:srgbClr val="1C401C"/>
+                  <a:srgbClr val="216E21"/>
                 </a:solidFill>
               </a:rPr>
               <a:t>신랑</a:t>
@@ -3735,11 +3735,11 @@
             <a:avLst/>
           </a:prstGeom>
           <a:solidFill>
-            <a:srgbClr val="D3EED3"/>
+            <a:srgbClr val="D4F7D4"/>
           </a:solidFill>
           <a:ln w="19050">
             <a:solidFill>
-              <a:srgbClr val="3A883A"/>
+              <a:srgbClr val="4ECA4E"/>
             </a:solidFill>
             <a:prstDash val="dash"/>
           </a:ln>
@@ -3758,7 +3758,7 @@
             <a:r>
               <a:rPr sz="1200" b="0" i="0">
                 <a:solidFill>
-                  <a:srgbClr val="1C401C"/>
+                  <a:srgbClr val="216E21"/>
                 </a:solidFill>
               </a:rPr>
               <a:t>사진</a:t>
@@ -3796,7 +3796,7 @@
             <a:r>
               <a:rPr sz="1600" b="1" i="0">
                 <a:solidFill>
-                  <a:srgbClr val="1C401C"/>
+                  <a:srgbClr val="216E21"/>
                 </a:solidFill>
               </a:rPr>
               <a:t>신부</a:t>
@@ -3886,7 +3886,7 @@
     <p:bg>
       <p:bgPr>
         <a:solidFill>
-          <a:srgbClr val="F1F9F1"/>
+          <a:srgbClr val="F3FCF3"/>
         </a:solidFill>
         <a:effectLst/>
       </p:bgPr>
@@ -3913,7 +3913,7 @@
             <a:avLst/>
           </a:prstGeom>
           <a:solidFill>
-            <a:srgbClr val="3A883A"/>
+            <a:srgbClr val="4ECA4E"/>
           </a:solidFill>
           <a:ln>
             <a:noFill/>
@@ -3942,7 +3942,7 @@
             <a:avLst/>
           </a:prstGeom>
           <a:solidFill>
-            <a:srgbClr val="663D8F"/>
+            <a:srgbClr val="339941"/>
           </a:solidFill>
           <a:ln>
             <a:noFill/>
@@ -3986,7 +3986,7 @@
             <a:r>
               <a:rPr sz="3000" b="1" i="0">
                 <a:solidFill>
-                  <a:srgbClr val="1C401C"/>
+                  <a:srgbClr val="216E21"/>
                 </a:solidFill>
               </a:rPr>
               <a:t>오시는 길</a:t>
@@ -4011,11 +4011,11 @@
             </a:avLst>
           </a:prstGeom>
           <a:solidFill>
-            <a:srgbClr val="D3EED3"/>
+            <a:srgbClr val="D4F7D4"/>
           </a:solidFill>
           <a:ln w="19050">
             <a:solidFill>
-              <a:srgbClr val="3A883A"/>
+              <a:srgbClr val="4ECA4E"/>
             </a:solidFill>
             <a:prstDash val="dash"/>
           </a:ln>
@@ -4034,7 +4034,7 @@
             <a:r>
               <a:rPr sz="1400" b="0" i="0">
                 <a:solidFill>
-                  <a:srgbClr val="1C401C"/>
+                  <a:srgbClr val="216E21"/>
                 </a:solidFill>
               </a:rPr>
               <a:t>약도 · 지도를 넣어 주세요</a:t>
@@ -4074,7 +4074,7 @@
                       <a:r>
                         <a:rPr sz="1400" b="1">
                           <a:solidFill>
-                            <a:srgbClr val="1C401C"/>
+                            <a:srgbClr val="216E21"/>
                           </a:solidFill>
                         </a:rPr>
                         <a:t>예식장</a:t>
@@ -4084,30 +4084,30 @@
                   <a:tcPr anchor="ctr" marL="73152" marR="73152">
                     <a:lnL w="9525" cap="flat" cmpd="sng" algn="ctr">
                       <a:solidFill>
-                        <a:srgbClr val="D3EED3"/>
+                        <a:srgbClr val="D4F7D4"/>
                       </a:solidFill>
                       <a:prstDash val="solid"/>
                     </a:lnL>
                     <a:lnR w="9525" cap="flat" cmpd="sng" algn="ctr">
                       <a:solidFill>
-                        <a:srgbClr val="D3EED3"/>
+                        <a:srgbClr val="D4F7D4"/>
                       </a:solidFill>
                       <a:prstDash val="solid"/>
                     </a:lnR>
                     <a:lnT w="9525" cap="flat" cmpd="sng" algn="ctr">
                       <a:solidFill>
-                        <a:srgbClr val="D3EED3"/>
+                        <a:srgbClr val="D4F7D4"/>
                       </a:solidFill>
                       <a:prstDash val="solid"/>
                     </a:lnT>
                     <a:lnB w="9525" cap="flat" cmpd="sng" algn="ctr">
                       <a:solidFill>
-                        <a:srgbClr val="D3EED3"/>
+                        <a:srgbClr val="D4F7D4"/>
                       </a:solidFill>
                       <a:prstDash val="solid"/>
                     </a:lnB>
                     <a:solidFill>
-                      <a:srgbClr val="D3EED3"/>
+                      <a:srgbClr val="D4F7D4"/>
                     </a:solidFill>
                   </a:tcPr>
                 </a:tc>
@@ -4130,30 +4130,30 @@
                   <a:tcPr anchor="ctr" marL="73152" marR="73152">
                     <a:lnL w="9525" cap="flat" cmpd="sng" algn="ctr">
                       <a:solidFill>
-                        <a:srgbClr val="D3EED3"/>
+                        <a:srgbClr val="D4F7D4"/>
                       </a:solidFill>
                       <a:prstDash val="solid"/>
                     </a:lnL>
                     <a:lnR w="9525" cap="flat" cmpd="sng" algn="ctr">
                       <a:solidFill>
-                        <a:srgbClr val="D3EED3"/>
+                        <a:srgbClr val="D4F7D4"/>
                       </a:solidFill>
                       <a:prstDash val="solid"/>
                     </a:lnR>
                     <a:lnT w="9525" cap="flat" cmpd="sng" algn="ctr">
                       <a:solidFill>
-                        <a:srgbClr val="D3EED3"/>
+                        <a:srgbClr val="D4F7D4"/>
                       </a:solidFill>
                       <a:prstDash val="solid"/>
                     </a:lnT>
                     <a:lnB w="9525" cap="flat" cmpd="sng" algn="ctr">
                       <a:solidFill>
-                        <a:srgbClr val="D3EED3"/>
+                        <a:srgbClr val="D4F7D4"/>
                       </a:solidFill>
                       <a:prstDash val="solid"/>
                     </a:lnB>
                     <a:solidFill>
-                      <a:srgbClr val="F1F9F1"/>
+                      <a:srgbClr val="F3FCF3"/>
                     </a:solidFill>
                   </a:tcPr>
                 </a:tc>
@@ -4168,7 +4168,7 @@
                       <a:r>
                         <a:rPr sz="1400" b="1">
                           <a:solidFill>
-                            <a:srgbClr val="1C401C"/>
+                            <a:srgbClr val="216E21"/>
                           </a:solidFill>
                         </a:rPr>
                         <a:t>주소</a:t>
@@ -4178,30 +4178,30 @@
                   <a:tcPr anchor="ctr" marL="73152" marR="73152">
                     <a:lnL w="9525" cap="flat" cmpd="sng" algn="ctr">
                       <a:solidFill>
-                        <a:srgbClr val="D3EED3"/>
+                        <a:srgbClr val="D4F7D4"/>
                       </a:solidFill>
                       <a:prstDash val="solid"/>
                     </a:lnL>
                     <a:lnR w="9525" cap="flat" cmpd="sng" algn="ctr">
                       <a:solidFill>
-                        <a:srgbClr val="D3EED3"/>
+                        <a:srgbClr val="D4F7D4"/>
                       </a:solidFill>
                       <a:prstDash val="solid"/>
                     </a:lnR>
                     <a:lnT w="9525" cap="flat" cmpd="sng" algn="ctr">
                       <a:solidFill>
-                        <a:srgbClr val="D3EED3"/>
+                        <a:srgbClr val="D4F7D4"/>
                       </a:solidFill>
                       <a:prstDash val="solid"/>
                     </a:lnT>
                     <a:lnB w="9525" cap="flat" cmpd="sng" algn="ctr">
                       <a:solidFill>
-                        <a:srgbClr val="D3EED3"/>
+                        <a:srgbClr val="D4F7D4"/>
                       </a:solidFill>
                       <a:prstDash val="solid"/>
                     </a:lnB>
                     <a:solidFill>
-                      <a:srgbClr val="D3EED3"/>
+                      <a:srgbClr val="D4F7D4"/>
                     </a:solidFill>
                   </a:tcPr>
                 </a:tc>
@@ -4224,25 +4224,25 @@
                   <a:tcPr anchor="ctr" marL="73152" marR="73152">
                     <a:lnL w="9525" cap="flat" cmpd="sng" algn="ctr">
                       <a:solidFill>
-                        <a:srgbClr val="D3EED3"/>
+                        <a:srgbClr val="D4F7D4"/>
                       </a:solidFill>
                       <a:prstDash val="solid"/>
                     </a:lnL>
                     <a:lnR w="9525" cap="flat" cmpd="sng" algn="ctr">
                       <a:solidFill>
-                        <a:srgbClr val="D3EED3"/>
+                        <a:srgbClr val="D4F7D4"/>
                       </a:solidFill>
                       <a:prstDash val="solid"/>
                     </a:lnR>
                     <a:lnT w="9525" cap="flat" cmpd="sng" algn="ctr">
                       <a:solidFill>
-                        <a:srgbClr val="D3EED3"/>
+                        <a:srgbClr val="D4F7D4"/>
                       </a:solidFill>
                       <a:prstDash val="solid"/>
                     </a:lnT>
                     <a:lnB w="9525" cap="flat" cmpd="sng" algn="ctr">
                       <a:solidFill>
-                        <a:srgbClr val="D3EED3"/>
+                        <a:srgbClr val="D4F7D4"/>
                       </a:solidFill>
                       <a:prstDash val="solid"/>
                     </a:lnB>
@@ -4262,7 +4262,7 @@
                       <a:r>
                         <a:rPr sz="1400" b="1">
                           <a:solidFill>
-                            <a:srgbClr val="1C401C"/>
+                            <a:srgbClr val="216E21"/>
                           </a:solidFill>
                         </a:rPr>
                         <a:t>일시</a:t>
@@ -4272,30 +4272,30 @@
                   <a:tcPr anchor="ctr" marL="73152" marR="73152">
                     <a:lnL w="9525" cap="flat" cmpd="sng" algn="ctr">
                       <a:solidFill>
-                        <a:srgbClr val="D3EED3"/>
+                        <a:srgbClr val="D4F7D4"/>
                       </a:solidFill>
                       <a:prstDash val="solid"/>
                     </a:lnL>
                     <a:lnR w="9525" cap="flat" cmpd="sng" algn="ctr">
                       <a:solidFill>
-                        <a:srgbClr val="D3EED3"/>
+                        <a:srgbClr val="D4F7D4"/>
                       </a:solidFill>
                       <a:prstDash val="solid"/>
                     </a:lnR>
                     <a:lnT w="9525" cap="flat" cmpd="sng" algn="ctr">
                       <a:solidFill>
-                        <a:srgbClr val="D3EED3"/>
+                        <a:srgbClr val="D4F7D4"/>
                       </a:solidFill>
                       <a:prstDash val="solid"/>
                     </a:lnT>
                     <a:lnB w="9525" cap="flat" cmpd="sng" algn="ctr">
                       <a:solidFill>
-                        <a:srgbClr val="D3EED3"/>
+                        <a:srgbClr val="D4F7D4"/>
                       </a:solidFill>
                       <a:prstDash val="solid"/>
                     </a:lnB>
                     <a:solidFill>
-                      <a:srgbClr val="D3EED3"/>
+                      <a:srgbClr val="D4F7D4"/>
                     </a:solidFill>
                   </a:tcPr>
                 </a:tc>
@@ -4318,30 +4318,30 @@
                   <a:tcPr anchor="ctr" marL="73152" marR="73152">
                     <a:lnL w="9525" cap="flat" cmpd="sng" algn="ctr">
                       <a:solidFill>
-                        <a:srgbClr val="D3EED3"/>
+                        <a:srgbClr val="D4F7D4"/>
                       </a:solidFill>
                       <a:prstDash val="solid"/>
                     </a:lnL>
                     <a:lnR w="9525" cap="flat" cmpd="sng" algn="ctr">
                       <a:solidFill>
-                        <a:srgbClr val="D3EED3"/>
+                        <a:srgbClr val="D4F7D4"/>
                       </a:solidFill>
                       <a:prstDash val="solid"/>
                     </a:lnR>
                     <a:lnT w="9525" cap="flat" cmpd="sng" algn="ctr">
                       <a:solidFill>
-                        <a:srgbClr val="D3EED3"/>
+                        <a:srgbClr val="D4F7D4"/>
                       </a:solidFill>
                       <a:prstDash val="solid"/>
                     </a:lnT>
                     <a:lnB w="9525" cap="flat" cmpd="sng" algn="ctr">
                       <a:solidFill>
-                        <a:srgbClr val="D3EED3"/>
+                        <a:srgbClr val="D4F7D4"/>
                       </a:solidFill>
                       <a:prstDash val="solid"/>
                     </a:lnB>
                     <a:solidFill>
-                      <a:srgbClr val="F1F9F1"/>
+                      <a:srgbClr val="F3FCF3"/>
                     </a:solidFill>
                   </a:tcPr>
                 </a:tc>
@@ -4356,7 +4356,7 @@
                       <a:r>
                         <a:rPr sz="1400" b="1">
                           <a:solidFill>
-                            <a:srgbClr val="1C401C"/>
+                            <a:srgbClr val="216E21"/>
                           </a:solidFill>
                         </a:rPr>
                         <a:t>연락처</a:t>
@@ -4366,30 +4366,30 @@
                   <a:tcPr anchor="ctr" marL="73152" marR="73152">
                     <a:lnL w="9525" cap="flat" cmpd="sng" algn="ctr">
                       <a:solidFill>
-                        <a:srgbClr val="D3EED3"/>
+                        <a:srgbClr val="D4F7D4"/>
                       </a:solidFill>
                       <a:prstDash val="solid"/>
                     </a:lnL>
                     <a:lnR w="9525" cap="flat" cmpd="sng" algn="ctr">
                       <a:solidFill>
-                        <a:srgbClr val="D3EED3"/>
+                        <a:srgbClr val="D4F7D4"/>
                       </a:solidFill>
                       <a:prstDash val="solid"/>
                     </a:lnR>
                     <a:lnT w="9525" cap="flat" cmpd="sng" algn="ctr">
                       <a:solidFill>
-                        <a:srgbClr val="D3EED3"/>
+                        <a:srgbClr val="D4F7D4"/>
                       </a:solidFill>
                       <a:prstDash val="solid"/>
                     </a:lnT>
                     <a:lnB w="9525" cap="flat" cmpd="sng" algn="ctr">
                       <a:solidFill>
-                        <a:srgbClr val="D3EED3"/>
+                        <a:srgbClr val="D4F7D4"/>
                       </a:solidFill>
                       <a:prstDash val="solid"/>
                     </a:lnB>
                     <a:solidFill>
-                      <a:srgbClr val="D3EED3"/>
+                      <a:srgbClr val="D4F7D4"/>
                     </a:solidFill>
                   </a:tcPr>
                 </a:tc>
@@ -4412,25 +4412,25 @@
                   <a:tcPr anchor="ctr" marL="73152" marR="73152">
                     <a:lnL w="9525" cap="flat" cmpd="sng" algn="ctr">
                       <a:solidFill>
-                        <a:srgbClr val="D3EED3"/>
+                        <a:srgbClr val="D4F7D4"/>
                       </a:solidFill>
                       <a:prstDash val="solid"/>
                     </a:lnL>
                     <a:lnR w="9525" cap="flat" cmpd="sng" algn="ctr">
                       <a:solidFill>
-                        <a:srgbClr val="D3EED3"/>
+                        <a:srgbClr val="D4F7D4"/>
                       </a:solidFill>
                       <a:prstDash val="solid"/>
                     </a:lnR>
                     <a:lnT w="9525" cap="flat" cmpd="sng" algn="ctr">
                       <a:solidFill>
-                        <a:srgbClr val="D3EED3"/>
+                        <a:srgbClr val="D4F7D4"/>
                       </a:solidFill>
                       <a:prstDash val="solid"/>
                     </a:lnT>
                     <a:lnB w="9525" cap="flat" cmpd="sng" algn="ctr">
                       <a:solidFill>
-                        <a:srgbClr val="D3EED3"/>
+                        <a:srgbClr val="D4F7D4"/>
                       </a:solidFill>
                       <a:prstDash val="solid"/>
                     </a:lnB>
@@ -4458,7 +4458,7 @@
     <p:bg>
       <p:bgPr>
         <a:solidFill>
-          <a:srgbClr val="F1F9F1"/>
+          <a:srgbClr val="F3FCF3"/>
         </a:solidFill>
         <a:effectLst/>
       </p:bgPr>
@@ -4485,7 +4485,7 @@
             <a:avLst/>
           </a:prstGeom>
           <a:solidFill>
-            <a:srgbClr val="3A883A"/>
+            <a:srgbClr val="4ECA4E"/>
           </a:solidFill>
           <a:ln>
             <a:noFill/>
@@ -4514,7 +4514,7 @@
             <a:avLst/>
           </a:prstGeom>
           <a:solidFill>
-            <a:srgbClr val="663D8F"/>
+            <a:srgbClr val="339941"/>
           </a:solidFill>
           <a:ln>
             <a:noFill/>
@@ -4558,7 +4558,7 @@
             <a:r>
               <a:rPr sz="3000" b="1" i="0">
                 <a:solidFill>
-                  <a:srgbClr val="1C401C"/>
+                  <a:srgbClr val="216E21"/>
                 </a:solidFill>
               </a:rPr>
               <a:t>교통 안내</a:t>
@@ -4583,11 +4583,11 @@
             </a:avLst>
           </a:prstGeom>
           <a:solidFill>
-            <a:srgbClr val="F1F9F1"/>
+            <a:srgbClr val="F3FCF3"/>
           </a:solidFill>
           <a:ln w="15875">
             <a:solidFill>
-              <a:srgbClr val="D3EED3"/>
+              <a:srgbClr val="D4F7D4"/>
             </a:solidFill>
           </a:ln>
         </p:spPr>
@@ -4614,7 +4614,7 @@
             <a:avLst/>
           </a:prstGeom>
           <a:solidFill>
-            <a:srgbClr val="3A883A"/>
+            <a:srgbClr val="4ECA4E"/>
           </a:solidFill>
           <a:ln>
             <a:noFill/>
@@ -4672,7 +4672,7 @@
             <a:r>
               <a:rPr sz="1800" b="1" i="0">
                 <a:solidFill>
-                  <a:srgbClr val="1C401C"/>
+                  <a:srgbClr val="216E21"/>
                 </a:solidFill>
               </a:rPr>
               <a:t>지하철</a:t>
@@ -4735,11 +4735,11 @@
             </a:avLst>
           </a:prstGeom>
           <a:solidFill>
-            <a:srgbClr val="F1F9F1"/>
+            <a:srgbClr val="F3FCF3"/>
           </a:solidFill>
           <a:ln w="15875">
             <a:solidFill>
-              <a:srgbClr val="D3EED3"/>
+              <a:srgbClr val="D4F7D4"/>
             </a:solidFill>
           </a:ln>
         </p:spPr>
@@ -4766,7 +4766,7 @@
             <a:avLst/>
           </a:prstGeom>
           <a:solidFill>
-            <a:srgbClr val="3A883A"/>
+            <a:srgbClr val="4ECA4E"/>
           </a:solidFill>
           <a:ln>
             <a:noFill/>
@@ -4824,7 +4824,7 @@
             <a:r>
               <a:rPr sz="1800" b="1" i="0">
                 <a:solidFill>
-                  <a:srgbClr val="1C401C"/>
+                  <a:srgbClr val="216E21"/>
                 </a:solidFill>
               </a:rPr>
               <a:t>버스</a:t>
@@ -4887,11 +4887,11 @@
             </a:avLst>
           </a:prstGeom>
           <a:solidFill>
-            <a:srgbClr val="F1F9F1"/>
+            <a:srgbClr val="F3FCF3"/>
           </a:solidFill>
           <a:ln w="15875">
             <a:solidFill>
-              <a:srgbClr val="D3EED3"/>
+              <a:srgbClr val="D4F7D4"/>
             </a:solidFill>
           </a:ln>
         </p:spPr>
@@ -4918,7 +4918,7 @@
             <a:avLst/>
           </a:prstGeom>
           <a:solidFill>
-            <a:srgbClr val="3A883A"/>
+            <a:srgbClr val="4ECA4E"/>
           </a:solidFill>
           <a:ln>
             <a:noFill/>
@@ -4976,7 +4976,7 @@
             <a:r>
               <a:rPr sz="1800" b="1" i="0">
                 <a:solidFill>
-                  <a:srgbClr val="1C401C"/>
+                  <a:srgbClr val="216E21"/>
                 </a:solidFill>
               </a:rPr>
               <a:t>자가용 · 주차</a:t>
@@ -5036,7 +5036,7 @@
     <p:bg>
       <p:bgPr>
         <a:solidFill>
-          <a:srgbClr val="F1F9F1"/>
+          <a:srgbClr val="F3FCF3"/>
         </a:solidFill>
         <a:effectLst/>
       </p:bgPr>
@@ -5063,7 +5063,7 @@
             <a:avLst/>
           </a:prstGeom>
           <a:solidFill>
-            <a:srgbClr val="3A883A"/>
+            <a:srgbClr val="4ECA4E"/>
           </a:solidFill>
           <a:ln>
             <a:noFill/>
@@ -5092,7 +5092,7 @@
             <a:avLst/>
           </a:prstGeom>
           <a:solidFill>
-            <a:srgbClr val="663D8F"/>
+            <a:srgbClr val="339941"/>
           </a:solidFill>
           <a:ln>
             <a:noFill/>
@@ -5136,7 +5136,7 @@
             <a:r>
               <a:rPr sz="3000" b="1" i="0">
                 <a:solidFill>
-                  <a:srgbClr val="1C401C"/>
+                  <a:srgbClr val="216E21"/>
                 </a:solidFill>
               </a:rPr>
               <a:t>웨딩 사진</a:t>
@@ -5161,11 +5161,11 @@
             </a:avLst>
           </a:prstGeom>
           <a:solidFill>
-            <a:srgbClr val="D3EED3"/>
+            <a:srgbClr val="D4F7D4"/>
           </a:solidFill>
           <a:ln w="19050">
             <a:solidFill>
-              <a:srgbClr val="3A883A"/>
+              <a:srgbClr val="4ECA4E"/>
             </a:solidFill>
             <a:prstDash val="dash"/>
           </a:ln>
@@ -5184,7 +5184,7 @@
             <a:r>
               <a:rPr sz="1200" b="0" i="0">
                 <a:solidFill>
-                  <a:srgbClr val="1C401C"/>
+                  <a:srgbClr val="216E21"/>
                 </a:solidFill>
               </a:rPr>
               <a:t>사진 1</a:t>
@@ -5209,11 +5209,11 @@
             </a:avLst>
           </a:prstGeom>
           <a:solidFill>
-            <a:srgbClr val="D3EED3"/>
+            <a:srgbClr val="D4F7D4"/>
           </a:solidFill>
           <a:ln w="19050">
             <a:solidFill>
-              <a:srgbClr val="3A883A"/>
+              <a:srgbClr val="4ECA4E"/>
             </a:solidFill>
             <a:prstDash val="dash"/>
           </a:ln>
@@ -5232,7 +5232,7 @@
             <a:r>
               <a:rPr sz="1200" b="0" i="0">
                 <a:solidFill>
-                  <a:srgbClr val="1C401C"/>
+                  <a:srgbClr val="216E21"/>
                 </a:solidFill>
               </a:rPr>
               <a:t>사진 2</a:t>
@@ -5257,11 +5257,11 @@
             </a:avLst>
           </a:prstGeom>
           <a:solidFill>
-            <a:srgbClr val="D3EED3"/>
+            <a:srgbClr val="D4F7D4"/>
           </a:solidFill>
           <a:ln w="19050">
             <a:solidFill>
-              <a:srgbClr val="3A883A"/>
+              <a:srgbClr val="4ECA4E"/>
             </a:solidFill>
             <a:prstDash val="dash"/>
           </a:ln>
@@ -5280,7 +5280,7 @@
             <a:r>
               <a:rPr sz="1200" b="0" i="0">
                 <a:solidFill>
-                  <a:srgbClr val="1C401C"/>
+                  <a:srgbClr val="216E21"/>
                 </a:solidFill>
               </a:rPr>
               <a:t>사진 3</a:t>
@@ -5305,11 +5305,11 @@
             </a:avLst>
           </a:prstGeom>
           <a:solidFill>
-            <a:srgbClr val="D3EED3"/>
+            <a:srgbClr val="D4F7D4"/>
           </a:solidFill>
           <a:ln w="19050">
             <a:solidFill>
-              <a:srgbClr val="3A883A"/>
+              <a:srgbClr val="4ECA4E"/>
             </a:solidFill>
             <a:prstDash val="dash"/>
           </a:ln>
@@ -5328,7 +5328,7 @@
             <a:r>
               <a:rPr sz="1200" b="0" i="0">
                 <a:solidFill>
-                  <a:srgbClr val="1C401C"/>
+                  <a:srgbClr val="216E21"/>
                 </a:solidFill>
               </a:rPr>
               <a:t>사진 4</a:t>
@@ -5353,11 +5353,11 @@
             </a:avLst>
           </a:prstGeom>
           <a:solidFill>
-            <a:srgbClr val="D3EED3"/>
+            <a:srgbClr val="D4F7D4"/>
           </a:solidFill>
           <a:ln w="19050">
             <a:solidFill>
-              <a:srgbClr val="3A883A"/>
+              <a:srgbClr val="4ECA4E"/>
             </a:solidFill>
             <a:prstDash val="dash"/>
           </a:ln>
@@ -5376,7 +5376,7 @@
             <a:r>
               <a:rPr sz="1200" b="0" i="0">
                 <a:solidFill>
-                  <a:srgbClr val="1C401C"/>
+                  <a:srgbClr val="216E21"/>
                 </a:solidFill>
               </a:rPr>
               <a:t>사진 5</a:t>
@@ -5401,11 +5401,11 @@
             </a:avLst>
           </a:prstGeom>
           <a:solidFill>
-            <a:srgbClr val="D3EED3"/>
+            <a:srgbClr val="D4F7D4"/>
           </a:solidFill>
           <a:ln w="19050">
             <a:solidFill>
-              <a:srgbClr val="3A883A"/>
+              <a:srgbClr val="4ECA4E"/>
             </a:solidFill>
             <a:prstDash val="dash"/>
           </a:ln>
@@ -5424,7 +5424,7 @@
             <a:r>
               <a:rPr sz="1200" b="0" i="0">
                 <a:solidFill>
-                  <a:srgbClr val="1C401C"/>
+                  <a:srgbClr val="216E21"/>
                 </a:solidFill>
               </a:rPr>
               <a:t>사진 6</a:t>
@@ -5504,7 +5504,7 @@
             <a:r>
               <a:rPr sz="3400" b="1" i="0">
                 <a:solidFill>
-                  <a:srgbClr val="1C401C"/>
+                  <a:srgbClr val="216E21"/>
                 </a:solidFill>
               </a:rPr>
               <a:t>와 주셔서 고맙습니다</a:t>
@@ -5542,7 +5542,7 @@
             <a:r>
               <a:rPr sz="1700" b="0" i="1">
                 <a:solidFill>
-                  <a:srgbClr val="1C401C"/>
+                  <a:srgbClr val="216E21"/>
                 </a:solidFill>
               </a:rPr>
               <a:t>잘 살겠습니다</a:t>
@@ -5607,34 +5607,34 @@
         <a:sysClr val="window" lastClr="FFFFFF"/>
       </a:lt1>
       <a:dk2>
-        <a:srgbClr val="1C401C"/>
+        <a:srgbClr val="216E21"/>
       </a:dk2>
       <a:lt2>
-        <a:srgbClr val="F1F9F1"/>
+        <a:srgbClr val="F3FCF3"/>
       </a:lt2>
       <a:accent1>
-        <a:srgbClr val="3A883A"/>
+        <a:srgbClr val="4ECA4E"/>
       </a:accent1>
       <a:accent2>
-        <a:srgbClr val="663D8F"/>
+        <a:srgbClr val="339941"/>
       </a:accent2>
       <a:accent3>
-        <a:srgbClr val="1C401C"/>
+        <a:srgbClr val="216E21"/>
       </a:accent3>
       <a:accent4>
-        <a:srgbClr val="D3EED3"/>
+        <a:srgbClr val="D4F7D4"/>
       </a:accent4>
       <a:accent5>
-        <a:srgbClr val="506264"/>
+        <a:srgbClr val="40B248"/>
       </a:accent5>
       <a:accent6>
-        <a:srgbClr val="778C77"/>
+        <a:srgbClr val="7AA87A"/>
       </a:accent6>
       <a:hlink>
-        <a:srgbClr val="3A883A"/>
+        <a:srgbClr val="4ECA4E"/>
       </a:hlink>
       <a:folHlink>
-        <a:srgbClr val="1C401C"/>
+        <a:srgbClr val="216E21"/>
       </a:folHlink>
     </a:clrScheme>
     <a:fontScheme name="Office">

--- a/public/fun/pack/pptx/wedding/결혼식_09_오시는길중심_모내기날.pptx
+++ b/public/fun/pack/pptx/wedding/결혼식_09_오시는길중심_모내기날.pptx
@@ -3286,6 +3286,14 @@
 <file path=ppt/slides/slide1.xml><?xml version="1.0" encoding="utf-8"?>
 <p:sld xmlns:a="http://schemas.openxmlformats.org/drawingml/2006/main" xmlns:p="http://schemas.openxmlformats.org/presentationml/2006/main" xmlns:r="http://schemas.openxmlformats.org/officeDocument/2006/relationships">
   <p:cSld>
+    <p:bg>
+      <p:bgPr>
+        <a:solidFill>
+          <a:srgbClr val="EAFDEA"/>
+        </a:solidFill>
+        <a:effectLst/>
+      </p:bgPr>
+    </p:bg>
     <p:spTree>
       <p:nvGrpSpPr>
         <p:cNvPr id="1" name=""/>
@@ -3293,30 +3301,119 @@
         <p:nvPr/>
       </p:nvGrpSpPr>
       <p:grpSpPr/>
-      <p:pic>
-        <p:nvPicPr>
-          <p:cNvPr id="3" name="표지 그림" descr="wedding-09.jpg"/>
-          <p:cNvPicPr>
-            <a:picLocks noChangeAspect="1"/>
-          </p:cNvPicPr>
+      <p:sp>
+        <p:nvSpPr>
+          <p:cNvPr id="3" name="사진 자리"/>
+          <p:cNvSpPr/>
           <p:nvPr/>
-        </p:nvPicPr>
-        <p:blipFill>
-          <a:blip r:embed="rId2"/>
-          <a:stretch>
-            <a:fillRect/>
-          </a:stretch>
-        </p:blipFill>
-        <p:spPr>
-          <a:xfrm>
-            <a:off x="0" y="0"/>
-            <a:ext cx="12191695" cy="6858000"/>
+        </p:nvSpPr>
+        <p:spPr>
+          <a:xfrm>
+            <a:off x="1463003" y="685800"/>
+            <a:ext cx="3169840" cy="5486400"/>
+          </a:xfrm>
+          <a:prstGeom prst="round2SameRect">
+            <a:avLst>
+              <a:gd name="adj1" fmla="val 50000"/>
+              <a:gd name="adj2" fmla="val 0"/>
+            </a:avLst>
+          </a:prstGeom>
+          <a:solidFill>
+            <a:srgbClr val="A6F2A6"/>
+          </a:solidFill>
+          <a:ln>
+            <a:noFill/>
+          </a:ln>
+        </p:spPr>
+        <p:txBody>
+          <a:bodyPr rtlCol="0" anchor="ctr" wrap="square" lIns="54864" rIns="54864" tIns="27432" bIns="27432">
+            <a:noAutofit/>
+          </a:bodyPr>
+          <a:lstStyle/>
+          <a:p>
+            <a:pPr algn="ctr">
+              <a:lnSpc>
+                <a:spcPct val="100000"/>
+              </a:lnSpc>
+            </a:pPr>
+            <a:r>
+              <a:rPr sz="1400" b="0" i="0">
+                <a:solidFill>
+                  <a:srgbClr val="274927"/>
+                </a:solidFill>
+              </a:rPr>
+              <a:t>사진을 넣어 주세요</a:t>
+            </a:r>
+          </a:p>
+        </p:txBody>
+      </p:sp>
+      <p:sp>
+        <p:nvSpPr>
+          <p:cNvPr id="4" name="장식"/>
+          <p:cNvSpPr/>
+          <p:nvPr/>
+        </p:nvSpPr>
+        <p:spPr>
+          <a:xfrm>
+            <a:off x="4358505" y="4251960"/>
+            <a:ext cx="1005840" cy="1005840"/>
+          </a:xfrm>
+          <a:prstGeom prst="ellipse">
+            <a:avLst/>
+          </a:prstGeom>
+          <a:solidFill>
+            <a:srgbClr val="A6F2A6"/>
+          </a:solidFill>
+          <a:ln>
+            <a:noFill/>
+          </a:ln>
+        </p:spPr>
+        <p:txBody>
+          <a:bodyPr rtlCol="0" anchor="ctr"/>
+          <a:lstStyle/>
+          <a:p>
+            <a:pPr algn="ctr"/>
+          </a:p>
+        </p:txBody>
+      </p:sp>
+      <p:sp>
+        <p:nvSpPr>
+          <p:cNvPr id="5" name="라벨"/>
+          <p:cNvSpPr txBox="1"/>
+          <p:nvPr/>
+        </p:nvSpPr>
+        <p:spPr>
+          <a:xfrm>
+            <a:off x="6827349" y="2148840"/>
+            <a:ext cx="4632844" cy="274320"/>
           </a:xfrm>
           <a:prstGeom prst="rect">
             <a:avLst/>
           </a:prstGeom>
-        </p:spPr>
-      </p:pic>
+          <a:noFill/>
+        </p:spPr>
+        <p:txBody>
+          <a:bodyPr wrap="square" lIns="54864" rIns="54864" tIns="27432" bIns="27432" anchor="t">
+            <a:noAutofit/>
+          </a:bodyPr>
+          <a:lstStyle/>
+          <a:p>
+            <a:pPr algn="l">
+              <a:lnSpc>
+                <a:spcPct val="115000"/>
+              </a:lnSpc>
+            </a:pPr>
+            <a:r>
+              <a:rPr sz="1000" b="1" i="0" spc="250">
+                <a:solidFill>
+                  <a:srgbClr val="26231F"/>
+                </a:solidFill>
+              </a:rPr>
+              <a:t>WEDDING</a:t>
+            </a:r>
+          </a:p>
+        </p:txBody>
+      </p:sp>
       <p:sp>
         <p:nvSpPr>
           <p:cNvPr id="2" name="Title 1"/>
@@ -3329,8 +3426,8 @@
         </p:nvSpPr>
         <p:spPr>
           <a:xfrm>
-            <a:off x="853418" y="2057400"/>
-            <a:ext cx="6095847" cy="1554480"/>
+            <a:off x="6827349" y="2606040"/>
+            <a:ext cx="4632844" cy="1188720"/>
           </a:xfrm>
         </p:spPr>
         <p:txBody>
@@ -3347,7 +3444,7 @@
             <a:r>
               <a:rPr sz="3600" b="1" i="0">
                 <a:solidFill>
-                  <a:srgbClr val="216E21"/>
+                  <a:srgbClr val="26231F"/>
                 </a:solidFill>
               </a:rPr>
               <a:t>저희 결혼합니다</a:t>
@@ -3357,14 +3454,14 @@
       </p:sp>
       <p:sp>
         <p:nvSpPr>
-          <p:cNvPr id="4" name="한 줄 문구"/>
+          <p:cNvPr id="6" name="한 줄 문구"/>
           <p:cNvSpPr txBox="1"/>
           <p:nvPr/>
         </p:nvSpPr>
         <p:spPr>
           <a:xfrm>
-            <a:off x="853418" y="3749039"/>
-            <a:ext cx="6095847" cy="822960"/>
+            <a:off x="6827349" y="3886200"/>
+            <a:ext cx="4632844" cy="822960"/>
           </a:xfrm>
           <a:prstGeom prst="rect">
             <a:avLst/>
@@ -3383,9 +3480,9 @@
               </a:lnSpc>
             </a:pPr>
             <a:r>
-              <a:rPr sz="1700" b="0" i="1">
-                <a:solidFill>
-                  <a:srgbClr val="216E21"/>
+              <a:rPr sz="1700" b="0" i="0">
+                <a:solidFill>
+                  <a:srgbClr val="26231F"/>
                 </a:solidFill>
               </a:rPr>
               <a:t>주차는 건물 지하를 이용해 주세요</a:t>
@@ -3395,14 +3492,14 @@
       </p:sp>
       <p:sp>
         <p:nvSpPr>
-          <p:cNvPr id="5" name="안내 문구"/>
+          <p:cNvPr id="7" name="안내 문구"/>
           <p:cNvSpPr txBox="1"/>
           <p:nvPr/>
         </p:nvSpPr>
         <p:spPr>
           <a:xfrm>
-            <a:off x="853418" y="4617720"/>
-            <a:ext cx="6095847" cy="914400"/>
+            <a:off x="6827349" y="4754880"/>
+            <a:ext cx="4632844" cy="914400"/>
           </a:xfrm>
           <a:prstGeom prst="rect">
             <a:avLst/>
@@ -3423,7 +3520,7 @@
             <a:r>
               <a:rPr sz="1400" b="0" i="0">
                 <a:solidFill>
-                  <a:srgbClr val="666666"/>
+                  <a:srgbClr val="26231F"/>
                 </a:solidFill>
               </a:rPr>
               <a:t>신랑 이름 ♥ 신부 이름</a:t>
@@ -3438,10 +3535,10 @@
             <a:r>
               <a:rPr sz="1400" b="0" i="0">
                 <a:solidFill>
-                  <a:srgbClr val="666666"/>
+                  <a:srgbClr val="26231F"/>
                 </a:solidFill>
               </a:rPr>
-              <a:t>2027. 00. 00 · 예식장 이름</a:t>
+              <a:t>날짜 입력 · 예식장 이름</a:t>
             </a:r>
           </a:p>
         </p:txBody>
@@ -3460,7 +3557,7 @@
     <p:bg>
       <p:bgPr>
         <a:solidFill>
-          <a:srgbClr val="F3FCF3"/>
+          <a:srgbClr val="FFFFFF"/>
         </a:solidFill>
         <a:effectLst/>
       </p:bgPr>
@@ -3480,14 +3577,14 @@
         </p:nvSpPr>
         <p:spPr>
           <a:xfrm>
-            <a:off x="0" y="0"/>
-            <a:ext cx="12191695" cy="274320"/>
-          </a:xfrm>
-          <a:prstGeom prst="rect">
+            <a:off x="10180015" y="-1645920"/>
+            <a:ext cx="3474720" cy="3474720"/>
+          </a:xfrm>
+          <a:prstGeom prst="ellipse">
             <a:avLst/>
           </a:prstGeom>
           <a:solidFill>
-            <a:srgbClr val="4ECA4E"/>
+            <a:srgbClr val="A6F2A6"/>
           </a:solidFill>
           <a:ln>
             <a:noFill/>
@@ -3503,20 +3600,58 @@
       </p:sp>
       <p:sp>
         <p:nvSpPr>
-          <p:cNvPr id="4" name="장식"/>
-          <p:cNvSpPr/>
+          <p:cNvPr id="4" name="상단 라벨"/>
+          <p:cNvSpPr txBox="1"/>
           <p:nvPr/>
         </p:nvSpPr>
         <p:spPr>
           <a:xfrm>
-            <a:off x="0" y="274320"/>
-            <a:ext cx="12191695" cy="54864"/>
+            <a:off x="640080" y="274320"/>
+            <a:ext cx="5486400" cy="274320"/>
           </a:xfrm>
           <a:prstGeom prst="rect">
             <a:avLst/>
           </a:prstGeom>
+          <a:noFill/>
+        </p:spPr>
+        <p:txBody>
+          <a:bodyPr wrap="square" lIns="54864" rIns="54864" tIns="27432" bIns="27432" anchor="ctr">
+            <a:noAutofit/>
+          </a:bodyPr>
+          <a:lstStyle/>
+          <a:p>
+            <a:pPr algn="l">
+              <a:lnSpc>
+                <a:spcPct val="115000"/>
+              </a:lnSpc>
+            </a:pPr>
+            <a:r>
+              <a:rPr sz="900" b="1" i="0" spc="250">
+                <a:solidFill>
+                  <a:srgbClr val="26231F"/>
+                </a:solidFill>
+              </a:rPr>
+              <a:t>WEDDING</a:t>
+            </a:r>
+          </a:p>
+        </p:txBody>
+      </p:sp>
+      <p:sp>
+        <p:nvSpPr>
+          <p:cNvPr id="5" name="포인트"/>
+          <p:cNvSpPr/>
+          <p:nvPr/>
+        </p:nvSpPr>
+        <p:spPr>
+          <a:xfrm>
+            <a:off x="11048695" y="502919"/>
+            <a:ext cx="274320" cy="274320"/>
+          </a:xfrm>
+          <a:prstGeom prst="round2SameRect">
+            <a:avLst/>
+          </a:prstGeom>
           <a:solidFill>
-            <a:srgbClr val="339941"/>
+            <a:srgbClr val="FFFFFF"/>
           </a:solidFill>
           <a:ln>
             <a:noFill/>
@@ -3542,8 +3677,8 @@
         </p:nvSpPr>
         <p:spPr>
           <a:xfrm>
-            <a:off x="640080" y="457200"/>
-            <a:ext cx="9722815" cy="868680"/>
+            <a:off x="640080" y="658368"/>
+            <a:ext cx="9082735" cy="868680"/>
           </a:xfrm>
         </p:spPr>
         <p:txBody>
@@ -3560,7 +3695,7 @@
             <a:r>
               <a:rPr sz="3000" b="1" i="0">
                 <a:solidFill>
-                  <a:srgbClr val="216E21"/>
+                  <a:srgbClr val="26231F"/>
                 </a:solidFill>
               </a:rPr>
               <a:t>신랑 · 신부 소개</a:t>
@@ -3570,25 +3705,23 @@
       </p:sp>
       <p:sp>
         <p:nvSpPr>
-          <p:cNvPr id="5" name="사진 자리"/>
+          <p:cNvPr id="6" name="사진 자리"/>
           <p:cNvSpPr/>
           <p:nvPr/>
         </p:nvSpPr>
         <p:spPr>
           <a:xfrm>
-            <a:off x="1939213" y="1600200"/>
-            <a:ext cx="2400300" cy="2400300"/>
+            <a:off x="1996363" y="1783080"/>
+            <a:ext cx="2286000" cy="2286000"/>
           </a:xfrm>
           <a:prstGeom prst="ellipse">
             <a:avLst/>
           </a:prstGeom>
           <a:solidFill>
-            <a:srgbClr val="D4F7D4"/>
+            <a:srgbClr val="D1FAD1"/>
           </a:solidFill>
           <a:ln w="19050">
-            <a:solidFill>
-              <a:srgbClr val="4ECA4E"/>
-            </a:solidFill>
+            <a:noFill/>
             <a:prstDash val="dash"/>
           </a:ln>
         </p:spPr>
@@ -3606,7 +3739,7 @@
             <a:r>
               <a:rPr sz="1200" b="0" i="0">
                 <a:solidFill>
-                  <a:srgbClr val="216E21"/>
+                  <a:srgbClr val="8E8780"/>
                 </a:solidFill>
               </a:rPr>
               <a:t>사진</a:t>
@@ -3616,13 +3749,13 @@
       </p:sp>
       <p:sp>
         <p:nvSpPr>
-          <p:cNvPr id="6" name="TextBox 5"/>
+          <p:cNvPr id="7" name="TextBox 6"/>
           <p:cNvSpPr txBox="1"/>
           <p:nvPr/>
         </p:nvSpPr>
         <p:spPr>
           <a:xfrm>
-            <a:off x="640080" y="4091939"/>
+            <a:off x="640080" y="4160520"/>
             <a:ext cx="4998567" cy="411480"/>
           </a:xfrm>
           <a:prstGeom prst="rect">
@@ -3644,7 +3777,7 @@
             <a:r>
               <a:rPr sz="1600" b="1" i="0">
                 <a:solidFill>
-                  <a:srgbClr val="216E21"/>
+                  <a:srgbClr val="274927"/>
                 </a:solidFill>
               </a:rPr>
               <a:t>신랑</a:t>
@@ -3654,14 +3787,14 @@
       </p:sp>
       <p:sp>
         <p:nvSpPr>
-          <p:cNvPr id="7" name="TextBox 6"/>
+          <p:cNvPr id="8" name="TextBox 7"/>
           <p:cNvSpPr txBox="1"/>
           <p:nvPr/>
         </p:nvSpPr>
         <p:spPr>
           <a:xfrm>
-            <a:off x="731519" y="4549140"/>
-            <a:ext cx="4815687" cy="1851660"/>
+            <a:off x="731519" y="4617720"/>
+            <a:ext cx="4815687" cy="1737360"/>
           </a:xfrm>
           <a:prstGeom prst="rect">
             <a:avLst/>
@@ -3722,25 +3855,23 @@
       </p:sp>
       <p:sp>
         <p:nvSpPr>
-          <p:cNvPr id="8" name="사진 자리"/>
+          <p:cNvPr id="9" name="사진 자리"/>
           <p:cNvSpPr/>
           <p:nvPr/>
         </p:nvSpPr>
         <p:spPr>
           <a:xfrm>
-            <a:off x="7852181" y="1600200"/>
-            <a:ext cx="2400300" cy="2400300"/>
+            <a:off x="7909331" y="1783080"/>
+            <a:ext cx="2286000" cy="2286000"/>
           </a:xfrm>
           <a:prstGeom prst="ellipse">
             <a:avLst/>
           </a:prstGeom>
           <a:solidFill>
-            <a:srgbClr val="D4F7D4"/>
+            <a:srgbClr val="D1FAD1"/>
           </a:solidFill>
           <a:ln w="19050">
-            <a:solidFill>
-              <a:srgbClr val="4ECA4E"/>
-            </a:solidFill>
+            <a:noFill/>
             <a:prstDash val="dash"/>
           </a:ln>
         </p:spPr>
@@ -3758,7 +3889,7 @@
             <a:r>
               <a:rPr sz="1200" b="0" i="0">
                 <a:solidFill>
-                  <a:srgbClr val="216E21"/>
+                  <a:srgbClr val="8E8780"/>
                 </a:solidFill>
               </a:rPr>
               <a:t>사진</a:t>
@@ -3768,13 +3899,13 @@
       </p:sp>
       <p:sp>
         <p:nvSpPr>
-          <p:cNvPr id="9" name="TextBox 8"/>
+          <p:cNvPr id="10" name="TextBox 9"/>
           <p:cNvSpPr txBox="1"/>
           <p:nvPr/>
         </p:nvSpPr>
         <p:spPr>
           <a:xfrm>
-            <a:off x="6553047" y="4091939"/>
+            <a:off x="6553047" y="4160520"/>
             <a:ext cx="4998567" cy="411480"/>
           </a:xfrm>
           <a:prstGeom prst="rect">
@@ -3796,7 +3927,7 @@
             <a:r>
               <a:rPr sz="1600" b="1" i="0">
                 <a:solidFill>
-                  <a:srgbClr val="216E21"/>
+                  <a:srgbClr val="274927"/>
                 </a:solidFill>
               </a:rPr>
               <a:t>신부</a:t>
@@ -3806,14 +3937,14 @@
       </p:sp>
       <p:sp>
         <p:nvSpPr>
-          <p:cNvPr id="10" name="TextBox 9"/>
+          <p:cNvPr id="11" name="TextBox 10"/>
           <p:cNvSpPr txBox="1"/>
           <p:nvPr/>
         </p:nvSpPr>
         <p:spPr>
           <a:xfrm>
-            <a:off x="6644487" y="4549140"/>
-            <a:ext cx="4815687" cy="1851660"/>
+            <a:off x="6644487" y="4617720"/>
+            <a:ext cx="4815687" cy="1737360"/>
           </a:xfrm>
           <a:prstGeom prst="rect">
             <a:avLst/>
@@ -3886,7 +4017,7 @@
     <p:bg>
       <p:bgPr>
         <a:solidFill>
-          <a:srgbClr val="F3FCF3"/>
+          <a:srgbClr val="FFFFFF"/>
         </a:solidFill>
         <a:effectLst/>
       </p:bgPr>
@@ -3906,14 +4037,14 @@
         </p:nvSpPr>
         <p:spPr>
           <a:xfrm>
-            <a:off x="0" y="0"/>
-            <a:ext cx="12191695" cy="274320"/>
-          </a:xfrm>
-          <a:prstGeom prst="rect">
+            <a:off x="10180015" y="-1645920"/>
+            <a:ext cx="3474720" cy="3474720"/>
+          </a:xfrm>
+          <a:prstGeom prst="ellipse">
             <a:avLst/>
           </a:prstGeom>
           <a:solidFill>
-            <a:srgbClr val="4ECA4E"/>
+            <a:srgbClr val="A6F2A6"/>
           </a:solidFill>
           <a:ln>
             <a:noFill/>
@@ -3929,20 +4060,58 @@
       </p:sp>
       <p:sp>
         <p:nvSpPr>
-          <p:cNvPr id="4" name="장식"/>
-          <p:cNvSpPr/>
+          <p:cNvPr id="4" name="상단 라벨"/>
+          <p:cNvSpPr txBox="1"/>
           <p:nvPr/>
         </p:nvSpPr>
         <p:spPr>
           <a:xfrm>
-            <a:off x="0" y="274320"/>
-            <a:ext cx="12191695" cy="54864"/>
+            <a:off x="640080" y="274320"/>
+            <a:ext cx="5486400" cy="274320"/>
           </a:xfrm>
           <a:prstGeom prst="rect">
             <a:avLst/>
           </a:prstGeom>
+          <a:noFill/>
+        </p:spPr>
+        <p:txBody>
+          <a:bodyPr wrap="square" lIns="54864" rIns="54864" tIns="27432" bIns="27432" anchor="ctr">
+            <a:noAutofit/>
+          </a:bodyPr>
+          <a:lstStyle/>
+          <a:p>
+            <a:pPr algn="l">
+              <a:lnSpc>
+                <a:spcPct val="115000"/>
+              </a:lnSpc>
+            </a:pPr>
+            <a:r>
+              <a:rPr sz="900" b="1" i="0" spc="250">
+                <a:solidFill>
+                  <a:srgbClr val="26231F"/>
+                </a:solidFill>
+              </a:rPr>
+              <a:t>WEDDING</a:t>
+            </a:r>
+          </a:p>
+        </p:txBody>
+      </p:sp>
+      <p:sp>
+        <p:nvSpPr>
+          <p:cNvPr id="5" name="포인트"/>
+          <p:cNvSpPr/>
+          <p:nvPr/>
+        </p:nvSpPr>
+        <p:spPr>
+          <a:xfrm>
+            <a:off x="11048695" y="502919"/>
+            <a:ext cx="274320" cy="274320"/>
+          </a:xfrm>
+          <a:prstGeom prst="round2SameRect">
+            <a:avLst/>
+          </a:prstGeom>
           <a:solidFill>
-            <a:srgbClr val="339941"/>
+            <a:srgbClr val="FFFFFF"/>
           </a:solidFill>
           <a:ln>
             <a:noFill/>
@@ -3968,8 +4137,8 @@
         </p:nvSpPr>
         <p:spPr>
           <a:xfrm>
-            <a:off x="640080" y="457200"/>
-            <a:ext cx="9722815" cy="868680"/>
+            <a:off x="640080" y="658368"/>
+            <a:ext cx="9082735" cy="868680"/>
           </a:xfrm>
         </p:spPr>
         <p:txBody>
@@ -3986,7 +4155,7 @@
             <a:r>
               <a:rPr sz="3000" b="1" i="0">
                 <a:solidFill>
-                  <a:srgbClr val="216E21"/>
+                  <a:srgbClr val="26231F"/>
                 </a:solidFill>
               </a:rPr>
               <a:t>오시는 길</a:t>
@@ -3996,14 +4165,14 @@
       </p:sp>
       <p:sp>
         <p:nvSpPr>
-          <p:cNvPr id="5" name="사진 자리"/>
+          <p:cNvPr id="6" name="사진 자리"/>
           <p:cNvSpPr/>
           <p:nvPr/>
         </p:nvSpPr>
         <p:spPr>
           <a:xfrm>
-            <a:off x="640080" y="1600200"/>
-            <a:ext cx="6035040" cy="4800600"/>
+            <a:off x="640080" y="1783080"/>
+            <a:ext cx="6035040" cy="4572000"/>
           </a:xfrm>
           <a:prstGeom prst="roundRect">
             <a:avLst>
@@ -4011,12 +4180,10 @@
             </a:avLst>
           </a:prstGeom>
           <a:solidFill>
-            <a:srgbClr val="D4F7D4"/>
+            <a:srgbClr val="D1FAD1"/>
           </a:solidFill>
           <a:ln w="19050">
-            <a:solidFill>
-              <a:srgbClr val="4ECA4E"/>
-            </a:solidFill>
+            <a:noFill/>
             <a:prstDash val="dash"/>
           </a:ln>
         </p:spPr>
@@ -4034,7 +4201,7 @@
             <a:r>
               <a:rPr sz="1400" b="0" i="0">
                 <a:solidFill>
-                  <a:srgbClr val="216E21"/>
+                  <a:srgbClr val="8E8780"/>
                 </a:solidFill>
               </a:rPr>
               <a:t>약도 · 지도를 넣어 주세요</a:t>
@@ -4044,14 +4211,14 @@
       </p:sp>
       <p:graphicFrame>
         <p:nvGraphicFramePr>
-          <p:cNvPr id="6" name="표"/>
+          <p:cNvPr id="7" name="표"/>
           <p:cNvGraphicFramePr>
             <a:graphicFrameLocks noGrp="1"/>
           </p:cNvGraphicFramePr>
           <p:nvPr/>
         </p:nvGraphicFramePr>
         <p:xfrm>
-          <a:off x="7040880" y="1600200"/>
+          <a:off x="7040880" y="1783080"/>
           <a:ext cx="4510735" cy="3291840"/>
         </p:xfrm>
         <a:graphic>
@@ -4074,7 +4241,7 @@
                       <a:r>
                         <a:rPr sz="1400" b="1">
                           <a:solidFill>
-                            <a:srgbClr val="216E21"/>
+                            <a:srgbClr val="274927"/>
                           </a:solidFill>
                         </a:rPr>
                         <a:t>예식장</a:t>
@@ -4084,30 +4251,30 @@
                   <a:tcPr anchor="ctr" marL="73152" marR="73152">
                     <a:lnL w="9525" cap="flat" cmpd="sng" algn="ctr">
                       <a:solidFill>
-                        <a:srgbClr val="D4F7D4"/>
+                        <a:srgbClr val="D1FAD1"/>
                       </a:solidFill>
                       <a:prstDash val="solid"/>
                     </a:lnL>
                     <a:lnR w="9525" cap="flat" cmpd="sng" algn="ctr">
                       <a:solidFill>
-                        <a:srgbClr val="D4F7D4"/>
+                        <a:srgbClr val="D1FAD1"/>
                       </a:solidFill>
                       <a:prstDash val="solid"/>
                     </a:lnR>
                     <a:lnT w="9525" cap="flat" cmpd="sng" algn="ctr">
                       <a:solidFill>
-                        <a:srgbClr val="D4F7D4"/>
+                        <a:srgbClr val="D1FAD1"/>
                       </a:solidFill>
                       <a:prstDash val="solid"/>
                     </a:lnT>
                     <a:lnB w="9525" cap="flat" cmpd="sng" algn="ctr">
                       <a:solidFill>
-                        <a:srgbClr val="D4F7D4"/>
+                        <a:srgbClr val="D1FAD1"/>
                       </a:solidFill>
                       <a:prstDash val="solid"/>
                     </a:lnB>
                     <a:solidFill>
-                      <a:srgbClr val="D4F7D4"/>
+                      <a:srgbClr val="D1FAD1"/>
                     </a:solidFill>
                   </a:tcPr>
                 </a:tc>
@@ -4120,7 +4287,7 @@
                       <a:r>
                         <a:rPr sz="1400" b="0">
                           <a:solidFill>
-                            <a:srgbClr val="2B2B2B"/>
+                            <a:srgbClr val="26231F"/>
                           </a:solidFill>
                         </a:rPr>
                         <a:t>입력하세요</a:t>
@@ -4130,30 +4297,30 @@
                   <a:tcPr anchor="ctr" marL="73152" marR="73152">
                     <a:lnL w="9525" cap="flat" cmpd="sng" algn="ctr">
                       <a:solidFill>
-                        <a:srgbClr val="D4F7D4"/>
+                        <a:srgbClr val="D1FAD1"/>
                       </a:solidFill>
                       <a:prstDash val="solid"/>
                     </a:lnL>
                     <a:lnR w="9525" cap="flat" cmpd="sng" algn="ctr">
                       <a:solidFill>
-                        <a:srgbClr val="D4F7D4"/>
+                        <a:srgbClr val="D1FAD1"/>
                       </a:solidFill>
                       <a:prstDash val="solid"/>
                     </a:lnR>
                     <a:lnT w="9525" cap="flat" cmpd="sng" algn="ctr">
                       <a:solidFill>
-                        <a:srgbClr val="D4F7D4"/>
+                        <a:srgbClr val="D1FAD1"/>
                       </a:solidFill>
                       <a:prstDash val="solid"/>
                     </a:lnT>
                     <a:lnB w="9525" cap="flat" cmpd="sng" algn="ctr">
                       <a:solidFill>
-                        <a:srgbClr val="D4F7D4"/>
+                        <a:srgbClr val="D1FAD1"/>
                       </a:solidFill>
                       <a:prstDash val="solid"/>
                     </a:lnB>
                     <a:solidFill>
-                      <a:srgbClr val="F3FCF3"/>
+                      <a:srgbClr val="EAFDEA"/>
                     </a:solidFill>
                   </a:tcPr>
                 </a:tc>
@@ -4168,7 +4335,7 @@
                       <a:r>
                         <a:rPr sz="1400" b="1">
                           <a:solidFill>
-                            <a:srgbClr val="216E21"/>
+                            <a:srgbClr val="274927"/>
                           </a:solidFill>
                         </a:rPr>
                         <a:t>주소</a:t>
@@ -4178,30 +4345,30 @@
                   <a:tcPr anchor="ctr" marL="73152" marR="73152">
                     <a:lnL w="9525" cap="flat" cmpd="sng" algn="ctr">
                       <a:solidFill>
-                        <a:srgbClr val="D4F7D4"/>
+                        <a:srgbClr val="D1FAD1"/>
                       </a:solidFill>
                       <a:prstDash val="solid"/>
                     </a:lnL>
                     <a:lnR w="9525" cap="flat" cmpd="sng" algn="ctr">
                       <a:solidFill>
-                        <a:srgbClr val="D4F7D4"/>
+                        <a:srgbClr val="D1FAD1"/>
                       </a:solidFill>
                       <a:prstDash val="solid"/>
                     </a:lnR>
                     <a:lnT w="9525" cap="flat" cmpd="sng" algn="ctr">
                       <a:solidFill>
-                        <a:srgbClr val="D4F7D4"/>
+                        <a:srgbClr val="D1FAD1"/>
                       </a:solidFill>
                       <a:prstDash val="solid"/>
                     </a:lnT>
                     <a:lnB w="9525" cap="flat" cmpd="sng" algn="ctr">
                       <a:solidFill>
-                        <a:srgbClr val="D4F7D4"/>
+                        <a:srgbClr val="D1FAD1"/>
                       </a:solidFill>
                       <a:prstDash val="solid"/>
                     </a:lnB>
                     <a:solidFill>
-                      <a:srgbClr val="D4F7D4"/>
+                      <a:srgbClr val="D1FAD1"/>
                     </a:solidFill>
                   </a:tcPr>
                 </a:tc>
@@ -4214,7 +4381,7 @@
                       <a:r>
                         <a:rPr sz="1400" b="0">
                           <a:solidFill>
-                            <a:srgbClr val="2B2B2B"/>
+                            <a:srgbClr val="26231F"/>
                           </a:solidFill>
                         </a:rPr>
                         <a:t>입력하세요</a:t>
@@ -4224,25 +4391,25 @@
                   <a:tcPr anchor="ctr" marL="73152" marR="73152">
                     <a:lnL w="9525" cap="flat" cmpd="sng" algn="ctr">
                       <a:solidFill>
-                        <a:srgbClr val="D4F7D4"/>
+                        <a:srgbClr val="D1FAD1"/>
                       </a:solidFill>
                       <a:prstDash val="solid"/>
                     </a:lnL>
                     <a:lnR w="9525" cap="flat" cmpd="sng" algn="ctr">
                       <a:solidFill>
-                        <a:srgbClr val="D4F7D4"/>
+                        <a:srgbClr val="D1FAD1"/>
                       </a:solidFill>
                       <a:prstDash val="solid"/>
                     </a:lnR>
                     <a:lnT w="9525" cap="flat" cmpd="sng" algn="ctr">
                       <a:solidFill>
-                        <a:srgbClr val="D4F7D4"/>
+                        <a:srgbClr val="D1FAD1"/>
                       </a:solidFill>
                       <a:prstDash val="solid"/>
                     </a:lnT>
                     <a:lnB w="9525" cap="flat" cmpd="sng" algn="ctr">
                       <a:solidFill>
-                        <a:srgbClr val="D4F7D4"/>
+                        <a:srgbClr val="D1FAD1"/>
                       </a:solidFill>
                       <a:prstDash val="solid"/>
                     </a:lnB>
@@ -4262,7 +4429,7 @@
                       <a:r>
                         <a:rPr sz="1400" b="1">
                           <a:solidFill>
-                            <a:srgbClr val="216E21"/>
+                            <a:srgbClr val="274927"/>
                           </a:solidFill>
                         </a:rPr>
                         <a:t>일시</a:t>
@@ -4272,30 +4439,30 @@
                   <a:tcPr anchor="ctr" marL="73152" marR="73152">
                     <a:lnL w="9525" cap="flat" cmpd="sng" algn="ctr">
                       <a:solidFill>
-                        <a:srgbClr val="D4F7D4"/>
+                        <a:srgbClr val="D1FAD1"/>
                       </a:solidFill>
                       <a:prstDash val="solid"/>
                     </a:lnL>
                     <a:lnR w="9525" cap="flat" cmpd="sng" algn="ctr">
                       <a:solidFill>
-                        <a:srgbClr val="D4F7D4"/>
+                        <a:srgbClr val="D1FAD1"/>
                       </a:solidFill>
                       <a:prstDash val="solid"/>
                     </a:lnR>
                     <a:lnT w="9525" cap="flat" cmpd="sng" algn="ctr">
                       <a:solidFill>
-                        <a:srgbClr val="D4F7D4"/>
+                        <a:srgbClr val="D1FAD1"/>
                       </a:solidFill>
                       <a:prstDash val="solid"/>
                     </a:lnT>
                     <a:lnB w="9525" cap="flat" cmpd="sng" algn="ctr">
                       <a:solidFill>
-                        <a:srgbClr val="D4F7D4"/>
+                        <a:srgbClr val="D1FAD1"/>
                       </a:solidFill>
                       <a:prstDash val="solid"/>
                     </a:lnB>
                     <a:solidFill>
-                      <a:srgbClr val="D4F7D4"/>
+                      <a:srgbClr val="D1FAD1"/>
                     </a:solidFill>
                   </a:tcPr>
                 </a:tc>
@@ -4308,7 +4475,7 @@
                       <a:r>
                         <a:rPr sz="1400" b="0">
                           <a:solidFill>
-                            <a:srgbClr val="2B2B2B"/>
+                            <a:srgbClr val="26231F"/>
                           </a:solidFill>
                         </a:rPr>
                         <a:t>입력하세요</a:t>
@@ -4318,30 +4485,30 @@
                   <a:tcPr anchor="ctr" marL="73152" marR="73152">
                     <a:lnL w="9525" cap="flat" cmpd="sng" algn="ctr">
                       <a:solidFill>
-                        <a:srgbClr val="D4F7D4"/>
+                        <a:srgbClr val="D1FAD1"/>
                       </a:solidFill>
                       <a:prstDash val="solid"/>
                     </a:lnL>
                     <a:lnR w="9525" cap="flat" cmpd="sng" algn="ctr">
                       <a:solidFill>
-                        <a:srgbClr val="D4F7D4"/>
+                        <a:srgbClr val="D1FAD1"/>
                       </a:solidFill>
                       <a:prstDash val="solid"/>
                     </a:lnR>
                     <a:lnT w="9525" cap="flat" cmpd="sng" algn="ctr">
                       <a:solidFill>
-                        <a:srgbClr val="D4F7D4"/>
+                        <a:srgbClr val="D1FAD1"/>
                       </a:solidFill>
                       <a:prstDash val="solid"/>
                     </a:lnT>
                     <a:lnB w="9525" cap="flat" cmpd="sng" algn="ctr">
                       <a:solidFill>
-                        <a:srgbClr val="D4F7D4"/>
+                        <a:srgbClr val="D1FAD1"/>
                       </a:solidFill>
                       <a:prstDash val="solid"/>
                     </a:lnB>
                     <a:solidFill>
-                      <a:srgbClr val="F3FCF3"/>
+                      <a:srgbClr val="EAFDEA"/>
                     </a:solidFill>
                   </a:tcPr>
                 </a:tc>
@@ -4356,7 +4523,7 @@
                       <a:r>
                         <a:rPr sz="1400" b="1">
                           <a:solidFill>
-                            <a:srgbClr val="216E21"/>
+                            <a:srgbClr val="274927"/>
                           </a:solidFill>
                         </a:rPr>
                         <a:t>연락처</a:t>
@@ -4366,30 +4533,30 @@
                   <a:tcPr anchor="ctr" marL="73152" marR="73152">
                     <a:lnL w="9525" cap="flat" cmpd="sng" algn="ctr">
                       <a:solidFill>
-                        <a:srgbClr val="D4F7D4"/>
+                        <a:srgbClr val="D1FAD1"/>
                       </a:solidFill>
                       <a:prstDash val="solid"/>
                     </a:lnL>
                     <a:lnR w="9525" cap="flat" cmpd="sng" algn="ctr">
                       <a:solidFill>
-                        <a:srgbClr val="D4F7D4"/>
+                        <a:srgbClr val="D1FAD1"/>
                       </a:solidFill>
                       <a:prstDash val="solid"/>
                     </a:lnR>
                     <a:lnT w="9525" cap="flat" cmpd="sng" algn="ctr">
                       <a:solidFill>
-                        <a:srgbClr val="D4F7D4"/>
+                        <a:srgbClr val="D1FAD1"/>
                       </a:solidFill>
                       <a:prstDash val="solid"/>
                     </a:lnT>
                     <a:lnB w="9525" cap="flat" cmpd="sng" algn="ctr">
                       <a:solidFill>
-                        <a:srgbClr val="D4F7D4"/>
+                        <a:srgbClr val="D1FAD1"/>
                       </a:solidFill>
                       <a:prstDash val="solid"/>
                     </a:lnB>
                     <a:solidFill>
-                      <a:srgbClr val="D4F7D4"/>
+                      <a:srgbClr val="D1FAD1"/>
                     </a:solidFill>
                   </a:tcPr>
                 </a:tc>
@@ -4402,7 +4569,7 @@
                       <a:r>
                         <a:rPr sz="1400" b="0">
                           <a:solidFill>
-                            <a:srgbClr val="2B2B2B"/>
+                            <a:srgbClr val="26231F"/>
                           </a:solidFill>
                         </a:rPr>
                         <a:t>입력하세요</a:t>
@@ -4412,25 +4579,25 @@
                   <a:tcPr anchor="ctr" marL="73152" marR="73152">
                     <a:lnL w="9525" cap="flat" cmpd="sng" algn="ctr">
                       <a:solidFill>
-                        <a:srgbClr val="D4F7D4"/>
+                        <a:srgbClr val="D1FAD1"/>
                       </a:solidFill>
                       <a:prstDash val="solid"/>
                     </a:lnL>
                     <a:lnR w="9525" cap="flat" cmpd="sng" algn="ctr">
                       <a:solidFill>
-                        <a:srgbClr val="D4F7D4"/>
+                        <a:srgbClr val="D1FAD1"/>
                       </a:solidFill>
                       <a:prstDash val="solid"/>
                     </a:lnR>
                     <a:lnT w="9525" cap="flat" cmpd="sng" algn="ctr">
                       <a:solidFill>
-                        <a:srgbClr val="D4F7D4"/>
+                        <a:srgbClr val="D1FAD1"/>
                       </a:solidFill>
                       <a:prstDash val="solid"/>
                     </a:lnT>
                     <a:lnB w="9525" cap="flat" cmpd="sng" algn="ctr">
                       <a:solidFill>
-                        <a:srgbClr val="D4F7D4"/>
+                        <a:srgbClr val="D1FAD1"/>
                       </a:solidFill>
                       <a:prstDash val="solid"/>
                     </a:lnB>
@@ -4458,7 +4625,7 @@
     <p:bg>
       <p:bgPr>
         <a:solidFill>
-          <a:srgbClr val="F3FCF3"/>
+          <a:srgbClr val="FFFFFF"/>
         </a:solidFill>
         <a:effectLst/>
       </p:bgPr>
@@ -4478,14 +4645,14 @@
         </p:nvSpPr>
         <p:spPr>
           <a:xfrm>
-            <a:off x="0" y="0"/>
-            <a:ext cx="12191695" cy="274320"/>
-          </a:xfrm>
-          <a:prstGeom prst="rect">
+            <a:off x="10180015" y="-1645920"/>
+            <a:ext cx="3474720" cy="3474720"/>
+          </a:xfrm>
+          <a:prstGeom prst="ellipse">
             <a:avLst/>
           </a:prstGeom>
           <a:solidFill>
-            <a:srgbClr val="4ECA4E"/>
+            <a:srgbClr val="A6F2A6"/>
           </a:solidFill>
           <a:ln>
             <a:noFill/>
@@ -4501,20 +4668,58 @@
       </p:sp>
       <p:sp>
         <p:nvSpPr>
-          <p:cNvPr id="4" name="장식"/>
-          <p:cNvSpPr/>
+          <p:cNvPr id="4" name="상단 라벨"/>
+          <p:cNvSpPr txBox="1"/>
           <p:nvPr/>
         </p:nvSpPr>
         <p:spPr>
           <a:xfrm>
-            <a:off x="0" y="274320"/>
-            <a:ext cx="12191695" cy="54864"/>
+            <a:off x="640080" y="274320"/>
+            <a:ext cx="5486400" cy="274320"/>
           </a:xfrm>
           <a:prstGeom prst="rect">
             <a:avLst/>
           </a:prstGeom>
+          <a:noFill/>
+        </p:spPr>
+        <p:txBody>
+          <a:bodyPr wrap="square" lIns="54864" rIns="54864" tIns="27432" bIns="27432" anchor="ctr">
+            <a:noAutofit/>
+          </a:bodyPr>
+          <a:lstStyle/>
+          <a:p>
+            <a:pPr algn="l">
+              <a:lnSpc>
+                <a:spcPct val="115000"/>
+              </a:lnSpc>
+            </a:pPr>
+            <a:r>
+              <a:rPr sz="900" b="1" i="0" spc="250">
+                <a:solidFill>
+                  <a:srgbClr val="26231F"/>
+                </a:solidFill>
+              </a:rPr>
+              <a:t>WEDDING</a:t>
+            </a:r>
+          </a:p>
+        </p:txBody>
+      </p:sp>
+      <p:sp>
+        <p:nvSpPr>
+          <p:cNvPr id="5" name="포인트"/>
+          <p:cNvSpPr/>
+          <p:nvPr/>
+        </p:nvSpPr>
+        <p:spPr>
+          <a:xfrm>
+            <a:off x="11048695" y="502919"/>
+            <a:ext cx="274320" cy="274320"/>
+          </a:xfrm>
+          <a:prstGeom prst="round2SameRect">
+            <a:avLst/>
+          </a:prstGeom>
           <a:solidFill>
-            <a:srgbClr val="339941"/>
+            <a:srgbClr val="FFFFFF"/>
           </a:solidFill>
           <a:ln>
             <a:noFill/>
@@ -4540,8 +4745,8 @@
         </p:nvSpPr>
         <p:spPr>
           <a:xfrm>
-            <a:off x="640080" y="457200"/>
-            <a:ext cx="9722815" cy="868680"/>
+            <a:off x="640080" y="658368"/>
+            <a:ext cx="9082735" cy="868680"/>
           </a:xfrm>
         </p:spPr>
         <p:txBody>
@@ -4558,7 +4763,7 @@
             <a:r>
               <a:rPr sz="3000" b="1" i="0">
                 <a:solidFill>
-                  <a:srgbClr val="216E21"/>
+                  <a:srgbClr val="26231F"/>
                 </a:solidFill>
               </a:rPr>
               <a:t>교통 안내</a:t>
@@ -4568,26 +4773,26 @@
       </p:sp>
       <p:sp>
         <p:nvSpPr>
-          <p:cNvPr id="5" name="카드 1"/>
+          <p:cNvPr id="6" name="카드 1"/>
           <p:cNvSpPr/>
           <p:nvPr/>
         </p:nvSpPr>
         <p:spPr>
           <a:xfrm>
-            <a:off x="640080" y="1600200"/>
-            <a:ext cx="3484778" cy="4800600"/>
+            <a:off x="640080" y="1783080"/>
+            <a:ext cx="3484778" cy="4572000"/>
           </a:xfrm>
           <a:prstGeom prst="roundRect">
             <a:avLst>
-              <a:gd name="adj" fmla="val 8000"/>
+              <a:gd name="adj" fmla="val 3000"/>
             </a:avLst>
           </a:prstGeom>
           <a:solidFill>
-            <a:srgbClr val="F3FCF3"/>
+            <a:srgbClr val="FFFFFF"/>
           </a:solidFill>
-          <a:ln w="15875">
+          <a:ln w="9525">
             <a:solidFill>
-              <a:srgbClr val="D4F7D4"/>
+              <a:srgbClr val="D1FAD1"/>
             </a:solidFill>
           </a:ln>
         </p:spPr>
@@ -4601,20 +4806,49 @@
       </p:sp>
       <p:sp>
         <p:nvSpPr>
-          <p:cNvPr id="6" name="번호 1"/>
+          <p:cNvPr id="7" name="위쪽 띠"/>
           <p:cNvSpPr/>
           <p:nvPr/>
         </p:nvSpPr>
         <p:spPr>
           <a:xfrm>
-            <a:off x="822959" y="1783080"/>
+            <a:off x="649224" y="1792224"/>
+            <a:ext cx="3466490" cy="82296"/>
+          </a:xfrm>
+          <a:prstGeom prst="rect">
+            <a:avLst/>
+          </a:prstGeom>
+          <a:solidFill>
+            <a:srgbClr val="97ED97"/>
+          </a:solidFill>
+          <a:ln>
+            <a:noFill/>
+          </a:ln>
+        </p:spPr>
+        <p:txBody>
+          <a:bodyPr rtlCol="0" anchor="ctr"/>
+          <a:lstStyle/>
+          <a:p>
+            <a:pPr algn="ctr"/>
+          </a:p>
+        </p:txBody>
+      </p:sp>
+      <p:sp>
+        <p:nvSpPr>
+          <p:cNvPr id="8" name="번호 1"/>
+          <p:cNvSpPr/>
+          <p:nvPr/>
+        </p:nvSpPr>
+        <p:spPr>
+          <a:xfrm>
+            <a:off x="822959" y="1965960"/>
             <a:ext cx="457200" cy="457200"/>
           </a:xfrm>
           <a:prstGeom prst="ellipse">
             <a:avLst/>
           </a:prstGeom>
           <a:solidFill>
-            <a:srgbClr val="4ECA4E"/>
+            <a:srgbClr val="BAF3D4"/>
           </a:solidFill>
           <a:ln>
             <a:noFill/>
@@ -4634,7 +4868,7 @@
             <a:r>
               <a:rPr sz="1600" b="1" i="0">
                 <a:solidFill>
-                  <a:srgbClr val="FFFFFF"/>
+                  <a:srgbClr val="26231F"/>
                 </a:solidFill>
               </a:rPr>
               <a:t>1</a:t>
@@ -4644,13 +4878,13 @@
       </p:sp>
       <p:sp>
         <p:nvSpPr>
-          <p:cNvPr id="7" name="TextBox 6"/>
+          <p:cNvPr id="9" name="TextBox 8"/>
           <p:cNvSpPr txBox="1"/>
           <p:nvPr/>
         </p:nvSpPr>
         <p:spPr>
           <a:xfrm>
-            <a:off x="777240" y="2377440"/>
+            <a:off x="777240" y="2560320"/>
             <a:ext cx="3210458" cy="640080"/>
           </a:xfrm>
           <a:prstGeom prst="rect">
@@ -4672,7 +4906,7 @@
             <a:r>
               <a:rPr sz="1800" b="1" i="0">
                 <a:solidFill>
-                  <a:srgbClr val="216E21"/>
+                  <a:srgbClr val="274927"/>
                 </a:solidFill>
               </a:rPr>
               <a:t>지하철</a:t>
@@ -4682,14 +4916,14 @@
       </p:sp>
       <p:sp>
         <p:nvSpPr>
-          <p:cNvPr id="8" name="TextBox 7"/>
+          <p:cNvPr id="10" name="TextBox 9"/>
           <p:cNvSpPr txBox="1"/>
           <p:nvPr/>
         </p:nvSpPr>
         <p:spPr>
           <a:xfrm>
-            <a:off x="777240" y="3063240"/>
-            <a:ext cx="3210458" cy="3200400"/>
+            <a:off x="777240" y="3246120"/>
+            <a:ext cx="3210458" cy="2971800"/>
           </a:xfrm>
           <a:prstGeom prst="rect">
             <a:avLst/>
@@ -4710,7 +4944,7 @@
             <a:r>
               <a:rPr sz="1500" b="0" i="0">
                 <a:solidFill>
-                  <a:srgbClr val="2B2B2B"/>
+                  <a:srgbClr val="26231F"/>
                 </a:solidFill>
               </a:rPr>
               <a:t>입력하세요</a:t>
@@ -4720,26 +4954,26 @@
       </p:sp>
       <p:sp>
         <p:nvSpPr>
-          <p:cNvPr id="9" name="카드 2"/>
+          <p:cNvPr id="11" name="카드 2"/>
           <p:cNvSpPr/>
           <p:nvPr/>
         </p:nvSpPr>
         <p:spPr>
           <a:xfrm>
-            <a:off x="4353458" y="1600200"/>
-            <a:ext cx="3484778" cy="4800600"/>
+            <a:off x="4353458" y="1783080"/>
+            <a:ext cx="3484778" cy="4572000"/>
           </a:xfrm>
           <a:prstGeom prst="roundRect">
             <a:avLst>
-              <a:gd name="adj" fmla="val 8000"/>
+              <a:gd name="adj" fmla="val 3000"/>
             </a:avLst>
           </a:prstGeom>
           <a:solidFill>
-            <a:srgbClr val="F3FCF3"/>
+            <a:srgbClr val="FFFFFF"/>
           </a:solidFill>
-          <a:ln w="15875">
+          <a:ln w="9525">
             <a:solidFill>
-              <a:srgbClr val="D4F7D4"/>
+              <a:srgbClr val="D1FAD1"/>
             </a:solidFill>
           </a:ln>
         </p:spPr>
@@ -4753,20 +4987,49 @@
       </p:sp>
       <p:sp>
         <p:nvSpPr>
-          <p:cNvPr id="10" name="번호 2"/>
+          <p:cNvPr id="12" name="위쪽 띠"/>
           <p:cNvSpPr/>
           <p:nvPr/>
         </p:nvSpPr>
         <p:spPr>
           <a:xfrm>
-            <a:off x="4536338" y="1783080"/>
+            <a:off x="4362602" y="1792224"/>
+            <a:ext cx="3466490" cy="82296"/>
+          </a:xfrm>
+          <a:prstGeom prst="rect">
+            <a:avLst/>
+          </a:prstGeom>
+          <a:solidFill>
+            <a:srgbClr val="97ED97"/>
+          </a:solidFill>
+          <a:ln>
+            <a:noFill/>
+          </a:ln>
+        </p:spPr>
+        <p:txBody>
+          <a:bodyPr rtlCol="0" anchor="ctr"/>
+          <a:lstStyle/>
+          <a:p>
+            <a:pPr algn="ctr"/>
+          </a:p>
+        </p:txBody>
+      </p:sp>
+      <p:sp>
+        <p:nvSpPr>
+          <p:cNvPr id="13" name="번호 2"/>
+          <p:cNvSpPr/>
+          <p:nvPr/>
+        </p:nvSpPr>
+        <p:spPr>
+          <a:xfrm>
+            <a:off x="4536338" y="1965960"/>
             <a:ext cx="457200" cy="457200"/>
           </a:xfrm>
           <a:prstGeom prst="ellipse">
             <a:avLst/>
           </a:prstGeom>
           <a:solidFill>
-            <a:srgbClr val="4ECA4E"/>
+            <a:srgbClr val="BAF3D4"/>
           </a:solidFill>
           <a:ln>
             <a:noFill/>
@@ -4786,7 +5049,7 @@
             <a:r>
               <a:rPr sz="1600" b="1" i="0">
                 <a:solidFill>
-                  <a:srgbClr val="FFFFFF"/>
+                  <a:srgbClr val="26231F"/>
                 </a:solidFill>
               </a:rPr>
               <a:t>2</a:t>
@@ -4796,13 +5059,13 @@
       </p:sp>
       <p:sp>
         <p:nvSpPr>
-          <p:cNvPr id="11" name="TextBox 10"/>
+          <p:cNvPr id="14" name="TextBox 13"/>
           <p:cNvSpPr txBox="1"/>
           <p:nvPr/>
         </p:nvSpPr>
         <p:spPr>
           <a:xfrm>
-            <a:off x="4490618" y="2377440"/>
+            <a:off x="4490618" y="2560320"/>
             <a:ext cx="3210458" cy="640080"/>
           </a:xfrm>
           <a:prstGeom prst="rect">
@@ -4824,7 +5087,7 @@
             <a:r>
               <a:rPr sz="1800" b="1" i="0">
                 <a:solidFill>
-                  <a:srgbClr val="216E21"/>
+                  <a:srgbClr val="274927"/>
                 </a:solidFill>
               </a:rPr>
               <a:t>버스</a:t>
@@ -4834,14 +5097,14 @@
       </p:sp>
       <p:sp>
         <p:nvSpPr>
-          <p:cNvPr id="12" name="TextBox 11"/>
+          <p:cNvPr id="15" name="TextBox 14"/>
           <p:cNvSpPr txBox="1"/>
           <p:nvPr/>
         </p:nvSpPr>
         <p:spPr>
           <a:xfrm>
-            <a:off x="4490618" y="3063240"/>
-            <a:ext cx="3210458" cy="3200400"/>
+            <a:off x="4490618" y="3246120"/>
+            <a:ext cx="3210458" cy="2971800"/>
           </a:xfrm>
           <a:prstGeom prst="rect">
             <a:avLst/>
@@ -4862,7 +5125,7 @@
             <a:r>
               <a:rPr sz="1500" b="0" i="0">
                 <a:solidFill>
-                  <a:srgbClr val="2B2B2B"/>
+                  <a:srgbClr val="26231F"/>
                 </a:solidFill>
               </a:rPr>
               <a:t>입력하세요</a:t>
@@ -4872,26 +5135,26 @@
       </p:sp>
       <p:sp>
         <p:nvSpPr>
-          <p:cNvPr id="13" name="카드 3"/>
+          <p:cNvPr id="16" name="카드 3"/>
           <p:cNvSpPr/>
           <p:nvPr/>
         </p:nvSpPr>
         <p:spPr>
           <a:xfrm>
-            <a:off x="8066836" y="1600200"/>
-            <a:ext cx="3484778" cy="4800600"/>
+            <a:off x="8066836" y="1783080"/>
+            <a:ext cx="3484778" cy="4572000"/>
           </a:xfrm>
           <a:prstGeom prst="roundRect">
             <a:avLst>
-              <a:gd name="adj" fmla="val 8000"/>
+              <a:gd name="adj" fmla="val 3000"/>
             </a:avLst>
           </a:prstGeom>
           <a:solidFill>
-            <a:srgbClr val="F3FCF3"/>
+            <a:srgbClr val="FFFFFF"/>
           </a:solidFill>
-          <a:ln w="15875">
+          <a:ln w="9525">
             <a:solidFill>
-              <a:srgbClr val="D4F7D4"/>
+              <a:srgbClr val="D1FAD1"/>
             </a:solidFill>
           </a:ln>
         </p:spPr>
@@ -4905,20 +5168,49 @@
       </p:sp>
       <p:sp>
         <p:nvSpPr>
-          <p:cNvPr id="14" name="번호 3"/>
+          <p:cNvPr id="17" name="위쪽 띠"/>
           <p:cNvSpPr/>
           <p:nvPr/>
         </p:nvSpPr>
         <p:spPr>
           <a:xfrm>
-            <a:off x="8249716" y="1783080"/>
+            <a:off x="8075980" y="1792224"/>
+            <a:ext cx="3466490" cy="82296"/>
+          </a:xfrm>
+          <a:prstGeom prst="rect">
+            <a:avLst/>
+          </a:prstGeom>
+          <a:solidFill>
+            <a:srgbClr val="97ED97"/>
+          </a:solidFill>
+          <a:ln>
+            <a:noFill/>
+          </a:ln>
+        </p:spPr>
+        <p:txBody>
+          <a:bodyPr rtlCol="0" anchor="ctr"/>
+          <a:lstStyle/>
+          <a:p>
+            <a:pPr algn="ctr"/>
+          </a:p>
+        </p:txBody>
+      </p:sp>
+      <p:sp>
+        <p:nvSpPr>
+          <p:cNvPr id="18" name="번호 3"/>
+          <p:cNvSpPr/>
+          <p:nvPr/>
+        </p:nvSpPr>
+        <p:spPr>
+          <a:xfrm>
+            <a:off x="8249716" y="1965960"/>
             <a:ext cx="457200" cy="457200"/>
           </a:xfrm>
           <a:prstGeom prst="ellipse">
             <a:avLst/>
           </a:prstGeom>
           <a:solidFill>
-            <a:srgbClr val="4ECA4E"/>
+            <a:srgbClr val="BAF3D4"/>
           </a:solidFill>
           <a:ln>
             <a:noFill/>
@@ -4938,7 +5230,7 @@
             <a:r>
               <a:rPr sz="1600" b="1" i="0">
                 <a:solidFill>
-                  <a:srgbClr val="FFFFFF"/>
+                  <a:srgbClr val="26231F"/>
                 </a:solidFill>
               </a:rPr>
               <a:t>3</a:t>
@@ -4948,13 +5240,13 @@
       </p:sp>
       <p:sp>
         <p:nvSpPr>
-          <p:cNvPr id="15" name="TextBox 14"/>
+          <p:cNvPr id="19" name="TextBox 18"/>
           <p:cNvSpPr txBox="1"/>
           <p:nvPr/>
         </p:nvSpPr>
         <p:spPr>
           <a:xfrm>
-            <a:off x="8203996" y="2377440"/>
+            <a:off x="8203996" y="2560320"/>
             <a:ext cx="3210458" cy="640080"/>
           </a:xfrm>
           <a:prstGeom prst="rect">
@@ -4976,7 +5268,7 @@
             <a:r>
               <a:rPr sz="1800" b="1" i="0">
                 <a:solidFill>
-                  <a:srgbClr val="216E21"/>
+                  <a:srgbClr val="274927"/>
                 </a:solidFill>
               </a:rPr>
               <a:t>자가용 · 주차</a:t>
@@ -4986,14 +5278,14 @@
       </p:sp>
       <p:sp>
         <p:nvSpPr>
-          <p:cNvPr id="16" name="TextBox 15"/>
+          <p:cNvPr id="20" name="TextBox 19"/>
           <p:cNvSpPr txBox="1"/>
           <p:nvPr/>
         </p:nvSpPr>
         <p:spPr>
           <a:xfrm>
-            <a:off x="8203996" y="3063240"/>
-            <a:ext cx="3210458" cy="3200400"/>
+            <a:off x="8203996" y="3246120"/>
+            <a:ext cx="3210458" cy="2971800"/>
           </a:xfrm>
           <a:prstGeom prst="rect">
             <a:avLst/>
@@ -5014,7 +5306,7 @@
             <a:r>
               <a:rPr sz="1500" b="0" i="0">
                 <a:solidFill>
-                  <a:srgbClr val="2B2B2B"/>
+                  <a:srgbClr val="26231F"/>
                 </a:solidFill>
               </a:rPr>
               <a:t>입력하세요</a:t>
@@ -5036,7 +5328,7 @@
     <p:bg>
       <p:bgPr>
         <a:solidFill>
-          <a:srgbClr val="F3FCF3"/>
+          <a:srgbClr val="FFFFFF"/>
         </a:solidFill>
         <a:effectLst/>
       </p:bgPr>
@@ -5056,14 +5348,14 @@
         </p:nvSpPr>
         <p:spPr>
           <a:xfrm>
-            <a:off x="0" y="0"/>
-            <a:ext cx="12191695" cy="274320"/>
-          </a:xfrm>
-          <a:prstGeom prst="rect">
+            <a:off x="10180015" y="-1645920"/>
+            <a:ext cx="3474720" cy="3474720"/>
+          </a:xfrm>
+          <a:prstGeom prst="ellipse">
             <a:avLst/>
           </a:prstGeom>
           <a:solidFill>
-            <a:srgbClr val="4ECA4E"/>
+            <a:srgbClr val="A6F2A6"/>
           </a:solidFill>
           <a:ln>
             <a:noFill/>
@@ -5079,20 +5371,58 @@
       </p:sp>
       <p:sp>
         <p:nvSpPr>
-          <p:cNvPr id="4" name="장식"/>
-          <p:cNvSpPr/>
+          <p:cNvPr id="4" name="상단 라벨"/>
+          <p:cNvSpPr txBox="1"/>
           <p:nvPr/>
         </p:nvSpPr>
         <p:spPr>
           <a:xfrm>
-            <a:off x="0" y="274320"/>
-            <a:ext cx="12191695" cy="54864"/>
+            <a:off x="640080" y="274320"/>
+            <a:ext cx="5486400" cy="274320"/>
           </a:xfrm>
           <a:prstGeom prst="rect">
             <a:avLst/>
           </a:prstGeom>
+          <a:noFill/>
+        </p:spPr>
+        <p:txBody>
+          <a:bodyPr wrap="square" lIns="54864" rIns="54864" tIns="27432" bIns="27432" anchor="ctr">
+            <a:noAutofit/>
+          </a:bodyPr>
+          <a:lstStyle/>
+          <a:p>
+            <a:pPr algn="l">
+              <a:lnSpc>
+                <a:spcPct val="115000"/>
+              </a:lnSpc>
+            </a:pPr>
+            <a:r>
+              <a:rPr sz="900" b="1" i="0" spc="250">
+                <a:solidFill>
+                  <a:srgbClr val="26231F"/>
+                </a:solidFill>
+              </a:rPr>
+              <a:t>WEDDING</a:t>
+            </a:r>
+          </a:p>
+        </p:txBody>
+      </p:sp>
+      <p:sp>
+        <p:nvSpPr>
+          <p:cNvPr id="5" name="포인트"/>
+          <p:cNvSpPr/>
+          <p:nvPr/>
+        </p:nvSpPr>
+        <p:spPr>
+          <a:xfrm>
+            <a:off x="11048695" y="502919"/>
+            <a:ext cx="274320" cy="274320"/>
+          </a:xfrm>
+          <a:prstGeom prst="round2SameRect">
+            <a:avLst/>
+          </a:prstGeom>
           <a:solidFill>
-            <a:srgbClr val="339941"/>
+            <a:srgbClr val="FFFFFF"/>
           </a:solidFill>
           <a:ln>
             <a:noFill/>
@@ -5118,8 +5448,8 @@
         </p:nvSpPr>
         <p:spPr>
           <a:xfrm>
-            <a:off x="640080" y="457200"/>
-            <a:ext cx="9722815" cy="868680"/>
+            <a:off x="640080" y="658368"/>
+            <a:ext cx="9082735" cy="868680"/>
           </a:xfrm>
         </p:spPr>
         <p:txBody>
@@ -5136,7 +5466,7 @@
             <a:r>
               <a:rPr sz="3000" b="1" i="0">
                 <a:solidFill>
-                  <a:srgbClr val="216E21"/>
+                  <a:srgbClr val="26231F"/>
                 </a:solidFill>
               </a:rPr>
               <a:t>웨딩 사진</a:t>
@@ -5146,14 +5476,14 @@
       </p:sp>
       <p:sp>
         <p:nvSpPr>
-          <p:cNvPr id="5" name="사진 자리"/>
+          <p:cNvPr id="6" name="사진 자리"/>
           <p:cNvSpPr/>
           <p:nvPr/>
         </p:nvSpPr>
         <p:spPr>
           <a:xfrm>
-            <a:off x="640080" y="1600200"/>
-            <a:ext cx="3515258" cy="2308860"/>
+            <a:off x="640080" y="1783080"/>
+            <a:ext cx="3515258" cy="2194560"/>
           </a:xfrm>
           <a:prstGeom prst="roundRect">
             <a:avLst>
@@ -5161,12 +5491,10 @@
             </a:avLst>
           </a:prstGeom>
           <a:solidFill>
-            <a:srgbClr val="D4F7D4"/>
+            <a:srgbClr val="D1FAD1"/>
           </a:solidFill>
           <a:ln w="19050">
-            <a:solidFill>
-              <a:srgbClr val="4ECA4E"/>
-            </a:solidFill>
+            <a:noFill/>
             <a:prstDash val="dash"/>
           </a:ln>
         </p:spPr>
@@ -5184,7 +5512,7 @@
             <a:r>
               <a:rPr sz="1200" b="0" i="0">
                 <a:solidFill>
-                  <a:srgbClr val="216E21"/>
+                  <a:srgbClr val="8E8780"/>
                 </a:solidFill>
               </a:rPr>
               <a:t>사진 1</a:t>
@@ -5194,14 +5522,14 @@
       </p:sp>
       <p:sp>
         <p:nvSpPr>
-          <p:cNvPr id="6" name="사진 자리"/>
+          <p:cNvPr id="7" name="사진 자리"/>
           <p:cNvSpPr/>
           <p:nvPr/>
         </p:nvSpPr>
         <p:spPr>
           <a:xfrm>
-            <a:off x="4338218" y="1600200"/>
-            <a:ext cx="3515258" cy="2308860"/>
+            <a:off x="4338218" y="1783080"/>
+            <a:ext cx="3515258" cy="2194560"/>
           </a:xfrm>
           <a:prstGeom prst="roundRect">
             <a:avLst>
@@ -5209,12 +5537,10 @@
             </a:avLst>
           </a:prstGeom>
           <a:solidFill>
-            <a:srgbClr val="D4F7D4"/>
+            <a:srgbClr val="D1FAD1"/>
           </a:solidFill>
           <a:ln w="19050">
-            <a:solidFill>
-              <a:srgbClr val="4ECA4E"/>
-            </a:solidFill>
+            <a:noFill/>
             <a:prstDash val="dash"/>
           </a:ln>
         </p:spPr>
@@ -5232,7 +5558,7 @@
             <a:r>
               <a:rPr sz="1200" b="0" i="0">
                 <a:solidFill>
-                  <a:srgbClr val="216E21"/>
+                  <a:srgbClr val="8E8780"/>
                 </a:solidFill>
               </a:rPr>
               <a:t>사진 2</a:t>
@@ -5242,14 +5568,14 @@
       </p:sp>
       <p:sp>
         <p:nvSpPr>
-          <p:cNvPr id="7" name="사진 자리"/>
+          <p:cNvPr id="8" name="사진 자리"/>
           <p:cNvSpPr/>
           <p:nvPr/>
         </p:nvSpPr>
         <p:spPr>
           <a:xfrm>
-            <a:off x="8036356" y="1600200"/>
-            <a:ext cx="3515258" cy="2308860"/>
+            <a:off x="8036356" y="1783080"/>
+            <a:ext cx="3515258" cy="2194560"/>
           </a:xfrm>
           <a:prstGeom prst="roundRect">
             <a:avLst>
@@ -5257,12 +5583,10 @@
             </a:avLst>
           </a:prstGeom>
           <a:solidFill>
-            <a:srgbClr val="D4F7D4"/>
+            <a:srgbClr val="D1FAD1"/>
           </a:solidFill>
           <a:ln w="19050">
-            <a:solidFill>
-              <a:srgbClr val="4ECA4E"/>
-            </a:solidFill>
+            <a:noFill/>
             <a:prstDash val="dash"/>
           </a:ln>
         </p:spPr>
@@ -5280,7 +5604,7 @@
             <a:r>
               <a:rPr sz="1200" b="0" i="0">
                 <a:solidFill>
-                  <a:srgbClr val="216E21"/>
+                  <a:srgbClr val="8E8780"/>
                 </a:solidFill>
               </a:rPr>
               <a:t>사진 3</a:t>
@@ -5290,14 +5614,14 @@
       </p:sp>
       <p:sp>
         <p:nvSpPr>
-          <p:cNvPr id="8" name="사진 자리"/>
+          <p:cNvPr id="9" name="사진 자리"/>
           <p:cNvSpPr/>
           <p:nvPr/>
         </p:nvSpPr>
         <p:spPr>
           <a:xfrm>
-            <a:off x="640080" y="4091939"/>
-            <a:ext cx="3515258" cy="2308860"/>
+            <a:off x="640080" y="4160520"/>
+            <a:ext cx="3515258" cy="2194560"/>
           </a:xfrm>
           <a:prstGeom prst="roundRect">
             <a:avLst>
@@ -5305,12 +5629,10 @@
             </a:avLst>
           </a:prstGeom>
           <a:solidFill>
-            <a:srgbClr val="D4F7D4"/>
+            <a:srgbClr val="D1FAD1"/>
           </a:solidFill>
           <a:ln w="19050">
-            <a:solidFill>
-              <a:srgbClr val="4ECA4E"/>
-            </a:solidFill>
+            <a:noFill/>
             <a:prstDash val="dash"/>
           </a:ln>
         </p:spPr>
@@ -5328,7 +5650,7 @@
             <a:r>
               <a:rPr sz="1200" b="0" i="0">
                 <a:solidFill>
-                  <a:srgbClr val="216E21"/>
+                  <a:srgbClr val="8E8780"/>
                 </a:solidFill>
               </a:rPr>
               <a:t>사진 4</a:t>
@@ -5338,14 +5660,14 @@
       </p:sp>
       <p:sp>
         <p:nvSpPr>
-          <p:cNvPr id="9" name="사진 자리"/>
+          <p:cNvPr id="10" name="사진 자리"/>
           <p:cNvSpPr/>
           <p:nvPr/>
         </p:nvSpPr>
         <p:spPr>
           <a:xfrm>
-            <a:off x="4338218" y="4091939"/>
-            <a:ext cx="3515258" cy="2308860"/>
+            <a:off x="4338218" y="4160520"/>
+            <a:ext cx="3515258" cy="2194560"/>
           </a:xfrm>
           <a:prstGeom prst="roundRect">
             <a:avLst>
@@ -5353,12 +5675,10 @@
             </a:avLst>
           </a:prstGeom>
           <a:solidFill>
-            <a:srgbClr val="D4F7D4"/>
+            <a:srgbClr val="D1FAD1"/>
           </a:solidFill>
           <a:ln w="19050">
-            <a:solidFill>
-              <a:srgbClr val="4ECA4E"/>
-            </a:solidFill>
+            <a:noFill/>
             <a:prstDash val="dash"/>
           </a:ln>
         </p:spPr>
@@ -5376,7 +5696,7 @@
             <a:r>
               <a:rPr sz="1200" b="0" i="0">
                 <a:solidFill>
-                  <a:srgbClr val="216E21"/>
+                  <a:srgbClr val="8E8780"/>
                 </a:solidFill>
               </a:rPr>
               <a:t>사진 5</a:t>
@@ -5386,14 +5706,14 @@
       </p:sp>
       <p:sp>
         <p:nvSpPr>
-          <p:cNvPr id="10" name="사진 자리"/>
+          <p:cNvPr id="11" name="사진 자리"/>
           <p:cNvSpPr/>
           <p:nvPr/>
         </p:nvSpPr>
         <p:spPr>
           <a:xfrm>
-            <a:off x="8036356" y="4091939"/>
-            <a:ext cx="3515258" cy="2308860"/>
+            <a:off x="8036356" y="4160520"/>
+            <a:ext cx="3515258" cy="2194560"/>
           </a:xfrm>
           <a:prstGeom prst="roundRect">
             <a:avLst>
@@ -5401,12 +5721,10 @@
             </a:avLst>
           </a:prstGeom>
           <a:solidFill>
-            <a:srgbClr val="D4F7D4"/>
+            <a:srgbClr val="D1FAD1"/>
           </a:solidFill>
           <a:ln w="19050">
-            <a:solidFill>
-              <a:srgbClr val="4ECA4E"/>
-            </a:solidFill>
+            <a:noFill/>
             <a:prstDash val="dash"/>
           </a:ln>
         </p:spPr>
@@ -5424,7 +5742,7 @@
             <a:r>
               <a:rPr sz="1200" b="0" i="0">
                 <a:solidFill>
-                  <a:srgbClr val="216E21"/>
+                  <a:srgbClr val="8E8780"/>
                 </a:solidFill>
               </a:rPr>
               <a:t>사진 6</a:t>
@@ -5443,6 +5761,14 @@
 <file path=ppt/slides/slide6.xml><?xml version="1.0" encoding="utf-8"?>
 <p:sld xmlns:a="http://schemas.openxmlformats.org/drawingml/2006/main" xmlns:p="http://schemas.openxmlformats.org/presentationml/2006/main" xmlns:r="http://schemas.openxmlformats.org/officeDocument/2006/relationships">
   <p:cSld>
+    <p:bg>
+      <p:bgPr>
+        <a:solidFill>
+          <a:srgbClr val="EAFDEA"/>
+        </a:solidFill>
+        <a:effectLst/>
+      </p:bgPr>
+    </p:bg>
     <p:spTree>
       <p:nvGrpSpPr>
         <p:cNvPr id="1" name=""/>
@@ -5450,30 +5776,119 @@
         <p:nvPr/>
       </p:nvGrpSpPr>
       <p:grpSpPr/>
-      <p:pic>
-        <p:nvPicPr>
-          <p:cNvPr id="3" name="표지 그림" descr="wedding-09.jpg"/>
-          <p:cNvPicPr>
-            <a:picLocks noChangeAspect="1"/>
-          </p:cNvPicPr>
+      <p:sp>
+        <p:nvSpPr>
+          <p:cNvPr id="3" name="사진 자리"/>
+          <p:cNvSpPr/>
           <p:nvPr/>
-        </p:nvPicPr>
-        <p:blipFill>
-          <a:blip r:embed="rId2"/>
-          <a:stretch>
-            <a:fillRect/>
-          </a:stretch>
-        </p:blipFill>
-        <p:spPr>
-          <a:xfrm>
-            <a:off x="0" y="0"/>
-            <a:ext cx="12191695" cy="6858000"/>
+        </p:nvSpPr>
+        <p:spPr>
+          <a:xfrm>
+            <a:off x="1463003" y="685800"/>
+            <a:ext cx="3169840" cy="5486400"/>
+          </a:xfrm>
+          <a:prstGeom prst="round2SameRect">
+            <a:avLst>
+              <a:gd name="adj1" fmla="val 50000"/>
+              <a:gd name="adj2" fmla="val 0"/>
+            </a:avLst>
+          </a:prstGeom>
+          <a:solidFill>
+            <a:srgbClr val="A6F2A6"/>
+          </a:solidFill>
+          <a:ln>
+            <a:noFill/>
+          </a:ln>
+        </p:spPr>
+        <p:txBody>
+          <a:bodyPr rtlCol="0" anchor="ctr" wrap="square" lIns="54864" rIns="54864" tIns="27432" bIns="27432">
+            <a:noAutofit/>
+          </a:bodyPr>
+          <a:lstStyle/>
+          <a:p>
+            <a:pPr algn="ctr">
+              <a:lnSpc>
+                <a:spcPct val="100000"/>
+              </a:lnSpc>
+            </a:pPr>
+            <a:r>
+              <a:rPr sz="1400" b="0" i="0">
+                <a:solidFill>
+                  <a:srgbClr val="274927"/>
+                </a:solidFill>
+              </a:rPr>
+              <a:t>사진을 넣어 주세요</a:t>
+            </a:r>
+          </a:p>
+        </p:txBody>
+      </p:sp>
+      <p:sp>
+        <p:nvSpPr>
+          <p:cNvPr id="4" name="장식"/>
+          <p:cNvSpPr/>
+          <p:nvPr/>
+        </p:nvSpPr>
+        <p:spPr>
+          <a:xfrm>
+            <a:off x="4358505" y="4251960"/>
+            <a:ext cx="1005840" cy="1005840"/>
+          </a:xfrm>
+          <a:prstGeom prst="ellipse">
+            <a:avLst/>
+          </a:prstGeom>
+          <a:solidFill>
+            <a:srgbClr val="A6F2A6"/>
+          </a:solidFill>
+          <a:ln>
+            <a:noFill/>
+          </a:ln>
+        </p:spPr>
+        <p:txBody>
+          <a:bodyPr rtlCol="0" anchor="ctr"/>
+          <a:lstStyle/>
+          <a:p>
+            <a:pPr algn="ctr"/>
+          </a:p>
+        </p:txBody>
+      </p:sp>
+      <p:sp>
+        <p:nvSpPr>
+          <p:cNvPr id="5" name="라벨"/>
+          <p:cNvSpPr txBox="1"/>
+          <p:nvPr/>
+        </p:nvSpPr>
+        <p:spPr>
+          <a:xfrm>
+            <a:off x="6827349" y="2148840"/>
+            <a:ext cx="4632844" cy="274320"/>
           </a:xfrm>
           <a:prstGeom prst="rect">
             <a:avLst/>
           </a:prstGeom>
-        </p:spPr>
-      </p:pic>
+          <a:noFill/>
+        </p:spPr>
+        <p:txBody>
+          <a:bodyPr wrap="square" lIns="54864" rIns="54864" tIns="27432" bIns="27432" anchor="t">
+            <a:noAutofit/>
+          </a:bodyPr>
+          <a:lstStyle/>
+          <a:p>
+            <a:pPr algn="l">
+              <a:lnSpc>
+                <a:spcPct val="115000"/>
+              </a:lnSpc>
+            </a:pPr>
+            <a:r>
+              <a:rPr sz="1000" b="1" i="0" spc="250">
+                <a:solidFill>
+                  <a:srgbClr val="26231F"/>
+                </a:solidFill>
+              </a:rPr>
+              <a:t>WEDDING</a:t>
+            </a:r>
+          </a:p>
+        </p:txBody>
+      </p:sp>
       <p:sp>
         <p:nvSpPr>
           <p:cNvPr id="2" name="Title 1"/>
@@ -5486,8 +5901,8 @@
         </p:nvSpPr>
         <p:spPr>
           <a:xfrm>
-            <a:off x="853418" y="2057400"/>
-            <a:ext cx="6095847" cy="1554480"/>
+            <a:off x="6827349" y="2606040"/>
+            <a:ext cx="4632844" cy="1188720"/>
           </a:xfrm>
         </p:spPr>
         <p:txBody>
@@ -5504,7 +5919,7 @@
             <a:r>
               <a:rPr sz="3400" b="1" i="0">
                 <a:solidFill>
-                  <a:srgbClr val="216E21"/>
+                  <a:srgbClr val="26231F"/>
                 </a:solidFill>
               </a:rPr>
               <a:t>와 주셔서 고맙습니다</a:t>
@@ -5514,14 +5929,14 @@
       </p:sp>
       <p:sp>
         <p:nvSpPr>
-          <p:cNvPr id="4" name="한 줄 문구"/>
+          <p:cNvPr id="6" name="한 줄 문구"/>
           <p:cNvSpPr txBox="1"/>
           <p:nvPr/>
         </p:nvSpPr>
         <p:spPr>
           <a:xfrm>
-            <a:off x="853418" y="3749039"/>
-            <a:ext cx="6095847" cy="822960"/>
+            <a:off x="6827349" y="3886200"/>
+            <a:ext cx="4632844" cy="822960"/>
           </a:xfrm>
           <a:prstGeom prst="rect">
             <a:avLst/>
@@ -5540,9 +5955,9 @@
               </a:lnSpc>
             </a:pPr>
             <a:r>
-              <a:rPr sz="1700" b="0" i="1">
-                <a:solidFill>
-                  <a:srgbClr val="216E21"/>
+              <a:rPr sz="1700" b="0" i="0">
+                <a:solidFill>
+                  <a:srgbClr val="26231F"/>
                 </a:solidFill>
               </a:rPr>
               <a:t>잘 살겠습니다</a:t>
@@ -5552,14 +5967,14 @@
       </p:sp>
       <p:sp>
         <p:nvSpPr>
-          <p:cNvPr id="5" name="안내 문구"/>
+          <p:cNvPr id="7" name="안내 문구"/>
           <p:cNvSpPr txBox="1"/>
           <p:nvPr/>
         </p:nvSpPr>
         <p:spPr>
           <a:xfrm>
-            <a:off x="853418" y="4617720"/>
-            <a:ext cx="6095847" cy="914400"/>
+            <a:off x="6827349" y="4754880"/>
+            <a:ext cx="4632844" cy="914400"/>
           </a:xfrm>
           <a:prstGeom prst="rect">
             <a:avLst/>
@@ -5580,7 +5995,7 @@
             <a:r>
               <a:rPr sz="1400" b="0" i="0">
                 <a:solidFill>
-                  <a:srgbClr val="666666"/>
+                  <a:srgbClr val="26231F"/>
                 </a:solidFill>
               </a:rPr>
               <a:t>신랑 이름 ♥ 신부 이름</a:t>
@@ -5607,34 +6022,34 @@
         <a:sysClr val="window" lastClr="FFFFFF"/>
       </a:lt1>
       <a:dk2>
-        <a:srgbClr val="216E21"/>
+        <a:srgbClr val="274927"/>
       </a:dk2>
       <a:lt2>
-        <a:srgbClr val="F3FCF3"/>
+        <a:srgbClr val="EAFDEA"/>
       </a:lt2>
       <a:accent1>
-        <a:srgbClr val="4ECA4E"/>
+        <a:srgbClr val="97ED97"/>
       </a:accent1>
       <a:accent2>
-        <a:srgbClr val="339941"/>
+        <a:srgbClr val="BAF3D4"/>
       </a:accent2>
       <a:accent3>
-        <a:srgbClr val="216E21"/>
+        <a:srgbClr val="274927"/>
       </a:accent3>
       <a:accent4>
-        <a:srgbClr val="D4F7D4"/>
+        <a:srgbClr val="D1FAD1"/>
       </a:accent4>
       <a:accent5>
-        <a:srgbClr val="40B248"/>
+        <a:srgbClr val="A8F0B6"/>
       </a:accent5>
       <a:accent6>
-        <a:srgbClr val="7AA87A"/>
+        <a:srgbClr val="7D927D"/>
       </a:accent6>
       <a:hlink>
-        <a:srgbClr val="4ECA4E"/>
+        <a:srgbClr val="97ED97"/>
       </a:hlink>
       <a:folHlink>
-        <a:srgbClr val="216E21"/>
+        <a:srgbClr val="274927"/>
       </a:folHlink>
     </a:clrScheme>
     <a:fontScheme name="Office">
